--- a/courses/apcsp/lect14b.pptx
+++ b/courses/apcsp/lect14b.pptx
@@ -147,7 +147,7 @@
 <file path=ppt/revisionInfo.xml><?xml version="1.0" encoding="utf-8"?>
 <p1510:revInfo xmlns:a="http://schemas.openxmlformats.org/drawingml/2006/main" xmlns:r="http://schemas.openxmlformats.org/officeDocument/2006/relationships" xmlns:p1510="http://schemas.microsoft.com/office/powerpoint/2015/10/main">
   <p1510:revLst>
-    <p1510:client id="{93BB9880-C423-7B4F-8EAD-EF280601F408}" v="4" dt="2024-11-23T13:03:53.440"/>
+    <p1510:client id="{68CB62E1-7729-AC44-8CEA-41ED91598FBE}" v="39" dt="2026-02-25T18:54:57.354"/>
   </p1510:revLst>
 </p1510:revInfo>
 </file>
@@ -155,2127 +155,42 @@
 <file path=ppt/changesInfos/changesInfo1.xml><?xml version="1.0" encoding="utf-8"?>
 <pc:chgInfo xmlns:a="http://schemas.openxmlformats.org/drawingml/2006/main" xmlns:r="http://schemas.openxmlformats.org/officeDocument/2006/relationships" xmlns:ac="http://schemas.microsoft.com/office/drawing/2013/main/command" xmlns:pc="http://schemas.microsoft.com/office/powerpoint/2013/main/command">
   <pc:docChgLst>
-    <pc:chgData name="Long B Nguyen" userId="f59fb8f3-a021-417a-8bc1-65c8d471c621" providerId="ADAL" clId="{CC9C9D9A-5149-2947-86C0-576F501F60DC}"/>
-    <pc:docChg chg="addSld modSld">
-      <pc:chgData name="Long B Nguyen" userId="f59fb8f3-a021-417a-8bc1-65c8d471c621" providerId="ADAL" clId="{CC9C9D9A-5149-2947-86C0-576F501F60DC}" dt="2020-01-05T21:59:55.597" v="2392" actId="14100"/>
+    <pc:chgData name="Long B Nguyen" userId="f59fb8f3-a021-417a-8bc1-65c8d471c621" providerId="ADAL" clId="{93BE87BA-F8CA-5C1F-82FF-B4CAB5F485A1}"/>
+    <pc:docChg chg="modSld">
+      <pc:chgData name="Long B Nguyen" userId="f59fb8f3-a021-417a-8bc1-65c8d471c621" providerId="ADAL" clId="{93BE87BA-F8CA-5C1F-82FF-B4CAB5F485A1}" dt="2026-02-25T18:54:57.354" v="38" actId="1076"/>
       <pc:docMkLst>
         <pc:docMk/>
       </pc:docMkLst>
-      <pc:sldChg chg="modSp add modAnim">
-        <pc:chgData name="Long B Nguyen" userId="f59fb8f3-a021-417a-8bc1-65c8d471c621" providerId="ADAL" clId="{CC9C9D9A-5149-2947-86C0-576F501F60DC}" dt="2020-01-04T15:49:37.373" v="563" actId="20577"/>
-        <pc:sldMkLst>
-          <pc:docMk/>
-          <pc:sldMk cId="924617162" sldId="319"/>
-        </pc:sldMkLst>
-      </pc:sldChg>
-      <pc:sldChg chg="modSp add">
-        <pc:chgData name="Long B Nguyen" userId="f59fb8f3-a021-417a-8bc1-65c8d471c621" providerId="ADAL" clId="{CC9C9D9A-5149-2947-86C0-576F501F60DC}" dt="2020-01-04T15:57:55.835" v="789" actId="14100"/>
-        <pc:sldMkLst>
-          <pc:docMk/>
-          <pc:sldMk cId="3758830494" sldId="320"/>
-        </pc:sldMkLst>
-      </pc:sldChg>
-      <pc:sldChg chg="modSp add">
-        <pc:chgData name="Long B Nguyen" userId="f59fb8f3-a021-417a-8bc1-65c8d471c621" providerId="ADAL" clId="{CC9C9D9A-5149-2947-86C0-576F501F60DC}" dt="2020-01-05T21:51:37.442" v="2325" actId="20577"/>
-        <pc:sldMkLst>
-          <pc:docMk/>
-          <pc:sldMk cId="1022945305" sldId="321"/>
-        </pc:sldMkLst>
-      </pc:sldChg>
-      <pc:sldChg chg="modSp add">
-        <pc:chgData name="Long B Nguyen" userId="f59fb8f3-a021-417a-8bc1-65c8d471c621" providerId="ADAL" clId="{CC9C9D9A-5149-2947-86C0-576F501F60DC}" dt="2020-01-04T17:41:57.489" v="1203" actId="20577"/>
-        <pc:sldMkLst>
-          <pc:docMk/>
-          <pc:sldMk cId="3456840474" sldId="322"/>
-        </pc:sldMkLst>
-      </pc:sldChg>
-      <pc:sldChg chg="modSp add">
-        <pc:chgData name="Long B Nguyen" userId="f59fb8f3-a021-417a-8bc1-65c8d471c621" providerId="ADAL" clId="{CC9C9D9A-5149-2947-86C0-576F501F60DC}" dt="2020-01-04T18:38:26.241" v="1214" actId="113"/>
-        <pc:sldMkLst>
-          <pc:docMk/>
-          <pc:sldMk cId="1062075874" sldId="323"/>
-        </pc:sldMkLst>
-      </pc:sldChg>
-      <pc:sldChg chg="modSp add">
-        <pc:chgData name="Long B Nguyen" userId="f59fb8f3-a021-417a-8bc1-65c8d471c621" providerId="ADAL" clId="{CC9C9D9A-5149-2947-86C0-576F501F60DC}" dt="2020-01-04T20:58:36.932" v="1972" actId="20577"/>
-        <pc:sldMkLst>
-          <pc:docMk/>
-          <pc:sldMk cId="1310010799" sldId="324"/>
-        </pc:sldMkLst>
-      </pc:sldChg>
-      <pc:sldChg chg="modSp add">
-        <pc:chgData name="Long B Nguyen" userId="f59fb8f3-a021-417a-8bc1-65c8d471c621" providerId="ADAL" clId="{CC9C9D9A-5149-2947-86C0-576F501F60DC}" dt="2020-01-05T21:27:04.952" v="2119" actId="20577"/>
-        <pc:sldMkLst>
-          <pc:docMk/>
-          <pc:sldMk cId="3314372952" sldId="325"/>
-        </pc:sldMkLst>
-      </pc:sldChg>
-      <pc:sldChg chg="modSp add">
-        <pc:chgData name="Long B Nguyen" userId="f59fb8f3-a021-417a-8bc1-65c8d471c621" providerId="ADAL" clId="{CC9C9D9A-5149-2947-86C0-576F501F60DC}" dt="2020-01-05T21:29:58.563" v="2178" actId="20577"/>
-        <pc:sldMkLst>
-          <pc:docMk/>
-          <pc:sldMk cId="3117943122" sldId="326"/>
-        </pc:sldMkLst>
-      </pc:sldChg>
-      <pc:sldChg chg="modSp add">
-        <pc:chgData name="Long B Nguyen" userId="f59fb8f3-a021-417a-8bc1-65c8d471c621" providerId="ADAL" clId="{CC9C9D9A-5149-2947-86C0-576F501F60DC}" dt="2020-01-05T21:59:55.597" v="2392" actId="14100"/>
-        <pc:sldMkLst>
-          <pc:docMk/>
-          <pc:sldMk cId="1025618360" sldId="327"/>
-        </pc:sldMkLst>
-      </pc:sldChg>
-      <pc:sldChg chg="modSp add">
-        <pc:chgData name="Long B Nguyen" userId="f59fb8f3-a021-417a-8bc1-65c8d471c621" providerId="ADAL" clId="{CC9C9D9A-5149-2947-86C0-576F501F60DC}" dt="2020-01-05T21:54:47.081" v="2356" actId="2711"/>
-        <pc:sldMkLst>
-          <pc:docMk/>
-          <pc:sldMk cId="3894299887" sldId="328"/>
-        </pc:sldMkLst>
-      </pc:sldChg>
-      <pc:sldChg chg="add">
-        <pc:chgData name="Long B Nguyen" userId="f59fb8f3-a021-417a-8bc1-65c8d471c621" providerId="ADAL" clId="{CC9C9D9A-5149-2947-86C0-576F501F60DC}" dt="2020-01-05T21:57:38.736" v="2357"/>
-        <pc:sldMkLst>
-          <pc:docMk/>
-          <pc:sldMk cId="4294143140" sldId="329"/>
-        </pc:sldMkLst>
-      </pc:sldChg>
-    </pc:docChg>
-  </pc:docChgLst>
-  <pc:docChgLst>
-    <pc:chgData name="Long B Nguyen" userId="f59fb8f3-a021-417a-8bc1-65c8d471c621" providerId="ADAL" clId="{A54A5039-9BC6-1548-AC61-7314DB675A9D}"/>
-    <pc:docChg chg="undo custSel addSld delSld modSld">
-      <pc:chgData name="Long B Nguyen" userId="f59fb8f3-a021-417a-8bc1-65c8d471c621" providerId="ADAL" clId="{A54A5039-9BC6-1548-AC61-7314DB675A9D}" dt="2019-09-25T14:26:33.714" v="2899" actId="20577"/>
-      <pc:docMkLst>
-        <pc:docMk/>
-      </pc:docMkLst>
-      <pc:sldChg chg="modSp">
-        <pc:chgData name="Long B Nguyen" userId="f59fb8f3-a021-417a-8bc1-65c8d471c621" providerId="ADAL" clId="{A54A5039-9BC6-1548-AC61-7314DB675A9D}" dt="2019-09-25T14:17:33.020" v="2843" actId="20577"/>
-        <pc:sldMkLst>
-          <pc:docMk/>
-          <pc:sldMk cId="4247104139" sldId="256"/>
-        </pc:sldMkLst>
-      </pc:sldChg>
-      <pc:sldChg chg="modSp modAnim">
-        <pc:chgData name="Long B Nguyen" userId="f59fb8f3-a021-417a-8bc1-65c8d471c621" providerId="ADAL" clId="{A54A5039-9BC6-1548-AC61-7314DB675A9D}" dt="2019-09-24T11:45:26.007" v="2185" actId="20577"/>
-        <pc:sldMkLst>
-          <pc:docMk/>
-          <pc:sldMk cId="1438711869" sldId="284"/>
-        </pc:sldMkLst>
-      </pc:sldChg>
-      <pc:sldChg chg="modSp">
-        <pc:chgData name="Long B Nguyen" userId="f59fb8f3-a021-417a-8bc1-65c8d471c621" providerId="ADAL" clId="{A54A5039-9BC6-1548-AC61-7314DB675A9D}" dt="2019-09-19T14:18:56.959" v="28" actId="20577"/>
-        <pc:sldMkLst>
-          <pc:docMk/>
-          <pc:sldMk cId="131840209" sldId="286"/>
-        </pc:sldMkLst>
-      </pc:sldChg>
-      <pc:sldChg chg="modSp add del modAnim">
-        <pc:chgData name="Long B Nguyen" userId="f59fb8f3-a021-417a-8bc1-65c8d471c621" providerId="ADAL" clId="{A54A5039-9BC6-1548-AC61-7314DB675A9D}" dt="2019-09-24T11:43:26.738" v="2146" actId="2696"/>
-        <pc:sldMkLst>
-          <pc:docMk/>
-          <pc:sldMk cId="3439768680" sldId="294"/>
-        </pc:sldMkLst>
-      </pc:sldChg>
-      <pc:sldChg chg="addSp modSp modAnim">
-        <pc:chgData name="Long B Nguyen" userId="f59fb8f3-a021-417a-8bc1-65c8d471c621" providerId="ADAL" clId="{A54A5039-9BC6-1548-AC61-7314DB675A9D}" dt="2019-09-23T12:04:10.373" v="1911"/>
-        <pc:sldMkLst>
-          <pc:docMk/>
-          <pc:sldMk cId="1816941262" sldId="295"/>
-        </pc:sldMkLst>
-      </pc:sldChg>
-      <pc:sldChg chg="modSp modAnim">
-        <pc:chgData name="Long B Nguyen" userId="f59fb8f3-a021-417a-8bc1-65c8d471c621" providerId="ADAL" clId="{A54A5039-9BC6-1548-AC61-7314DB675A9D}" dt="2019-09-23T11:59:17.508" v="1794"/>
-        <pc:sldMkLst>
-          <pc:docMk/>
-          <pc:sldMk cId="553003360" sldId="296"/>
-        </pc:sldMkLst>
-      </pc:sldChg>
-      <pc:sldChg chg="modSp modAnim">
-        <pc:chgData name="Long B Nguyen" userId="f59fb8f3-a021-417a-8bc1-65c8d471c621" providerId="ADAL" clId="{A54A5039-9BC6-1548-AC61-7314DB675A9D}" dt="2019-09-23T11:59:34.632" v="1798"/>
-        <pc:sldMkLst>
-          <pc:docMk/>
-          <pc:sldMk cId="3006175481" sldId="297"/>
-        </pc:sldMkLst>
-      </pc:sldChg>
-      <pc:sldChg chg="modSp modAnim">
-        <pc:chgData name="Long B Nguyen" userId="f59fb8f3-a021-417a-8bc1-65c8d471c621" providerId="ADAL" clId="{A54A5039-9BC6-1548-AC61-7314DB675A9D}" dt="2019-09-23T12:06:41.861" v="1992"/>
-        <pc:sldMkLst>
-          <pc:docMk/>
-          <pc:sldMk cId="3150557076" sldId="298"/>
-        </pc:sldMkLst>
-      </pc:sldChg>
       <pc:sldChg chg="addSp delSp modSp modAnim">
-        <pc:chgData name="Long B Nguyen" userId="f59fb8f3-a021-417a-8bc1-65c8d471c621" providerId="ADAL" clId="{A54A5039-9BC6-1548-AC61-7314DB675A9D}" dt="2019-09-23T12:01:44.436" v="1840"/>
-        <pc:sldMkLst>
-          <pc:docMk/>
-          <pc:sldMk cId="128704095" sldId="302"/>
-        </pc:sldMkLst>
-      </pc:sldChg>
-      <pc:sldChg chg="modSp add modAnim">
-        <pc:chgData name="Long B Nguyen" userId="f59fb8f3-a021-417a-8bc1-65c8d471c621" providerId="ADAL" clId="{A54A5039-9BC6-1548-AC61-7314DB675A9D}" dt="2019-09-23T12:00:26.516" v="1826" actId="20577"/>
-        <pc:sldMkLst>
-          <pc:docMk/>
-          <pc:sldMk cId="3275945509" sldId="303"/>
-        </pc:sldMkLst>
-      </pc:sldChg>
-      <pc:sldChg chg="modSp add modAnim">
-        <pc:chgData name="Long B Nguyen" userId="f59fb8f3-a021-417a-8bc1-65c8d471c621" providerId="ADAL" clId="{A54A5039-9BC6-1548-AC61-7314DB675A9D}" dt="2019-09-23T12:00:38.314" v="1827"/>
-        <pc:sldMkLst>
-          <pc:docMk/>
-          <pc:sldMk cId="406772024" sldId="304"/>
-        </pc:sldMkLst>
-      </pc:sldChg>
-      <pc:sldChg chg="modSp add modAnim">
-        <pc:chgData name="Long B Nguyen" userId="f59fb8f3-a021-417a-8bc1-65c8d471c621" providerId="ADAL" clId="{A54A5039-9BC6-1548-AC61-7314DB675A9D}" dt="2019-09-23T13:27:58.707" v="2000" actId="20577"/>
-        <pc:sldMkLst>
-          <pc:docMk/>
-          <pc:sldMk cId="1703902501" sldId="305"/>
-        </pc:sldMkLst>
-      </pc:sldChg>
-      <pc:sldChg chg="modSp add modAnim">
-        <pc:chgData name="Long B Nguyen" userId="f59fb8f3-a021-417a-8bc1-65c8d471c621" providerId="ADAL" clId="{A54A5039-9BC6-1548-AC61-7314DB675A9D}" dt="2019-09-23T12:01:58.728" v="1843"/>
-        <pc:sldMkLst>
-          <pc:docMk/>
-          <pc:sldMk cId="3614829039" sldId="306"/>
-        </pc:sldMkLst>
-      </pc:sldChg>
-      <pc:sldChg chg="modSp add modAnim">
-        <pc:chgData name="Long B Nguyen" userId="f59fb8f3-a021-417a-8bc1-65c8d471c621" providerId="ADAL" clId="{A54A5039-9BC6-1548-AC61-7314DB675A9D}" dt="2019-09-23T12:02:15.154" v="1846"/>
-        <pc:sldMkLst>
-          <pc:docMk/>
-          <pc:sldMk cId="295911327" sldId="307"/>
-        </pc:sldMkLst>
-      </pc:sldChg>
-      <pc:sldChg chg="modSp add modAnim">
-        <pc:chgData name="Long B Nguyen" userId="f59fb8f3-a021-417a-8bc1-65c8d471c621" providerId="ADAL" clId="{A54A5039-9BC6-1548-AC61-7314DB675A9D}" dt="2019-09-23T12:01:05.311" v="1832"/>
-        <pc:sldMkLst>
-          <pc:docMk/>
-          <pc:sldMk cId="67957925" sldId="308"/>
-        </pc:sldMkLst>
-      </pc:sldChg>
-      <pc:sldChg chg="modSp add modAnim">
-        <pc:chgData name="Long B Nguyen" userId="f59fb8f3-a021-417a-8bc1-65c8d471c621" providerId="ADAL" clId="{A54A5039-9BC6-1548-AC61-7314DB675A9D}" dt="2019-09-23T12:01:18.117" v="1835"/>
-        <pc:sldMkLst>
-          <pc:docMk/>
-          <pc:sldMk cId="1872435103" sldId="309"/>
-        </pc:sldMkLst>
-      </pc:sldChg>
-      <pc:sldChg chg="modSp add">
-        <pc:chgData name="Long B Nguyen" userId="f59fb8f3-a021-417a-8bc1-65c8d471c621" providerId="ADAL" clId="{A54A5039-9BC6-1548-AC61-7314DB675A9D}" dt="2019-09-20T12:40:48.118" v="1409" actId="20577"/>
-        <pc:sldMkLst>
-          <pc:docMk/>
-          <pc:sldMk cId="4088965571" sldId="310"/>
-        </pc:sldMkLst>
-      </pc:sldChg>
-      <pc:sldChg chg="modSp add modAnim">
-        <pc:chgData name="Long B Nguyen" userId="f59fb8f3-a021-417a-8bc1-65c8d471c621" providerId="ADAL" clId="{A54A5039-9BC6-1548-AC61-7314DB675A9D}" dt="2019-09-23T12:01:26.997" v="1836"/>
-        <pc:sldMkLst>
-          <pc:docMk/>
-          <pc:sldMk cId="2255846137" sldId="311"/>
-        </pc:sldMkLst>
-      </pc:sldChg>
-      <pc:sldChg chg="modSp add">
-        <pc:chgData name="Long B Nguyen" userId="f59fb8f3-a021-417a-8bc1-65c8d471c621" providerId="ADAL" clId="{A54A5039-9BC6-1548-AC61-7314DB675A9D}" dt="2019-09-23T11:49:40.764" v="1759" actId="20577"/>
-        <pc:sldMkLst>
-          <pc:docMk/>
-          <pc:sldMk cId="1513627164" sldId="312"/>
-        </pc:sldMkLst>
-      </pc:sldChg>
-      <pc:sldChg chg="modSp add modAnim">
-        <pc:chgData name="Long B Nguyen" userId="f59fb8f3-a021-417a-8bc1-65c8d471c621" providerId="ADAL" clId="{A54A5039-9BC6-1548-AC61-7314DB675A9D}" dt="2019-09-23T11:58:57.499" v="1789"/>
-        <pc:sldMkLst>
-          <pc:docMk/>
-          <pc:sldMk cId="2097059918" sldId="313"/>
-        </pc:sldMkLst>
-      </pc:sldChg>
-      <pc:sldChg chg="modSp add del">
-        <pc:chgData name="Long B Nguyen" userId="f59fb8f3-a021-417a-8bc1-65c8d471c621" providerId="ADAL" clId="{A54A5039-9BC6-1548-AC61-7314DB675A9D}" dt="2019-09-24T11:43:27.284" v="2147" actId="2696"/>
-        <pc:sldMkLst>
-          <pc:docMk/>
-          <pc:sldMk cId="3916896519" sldId="314"/>
-        </pc:sldMkLst>
-      </pc:sldChg>
-      <pc:sldChg chg="modSp add del">
-        <pc:chgData name="Long B Nguyen" userId="f59fb8f3-a021-417a-8bc1-65c8d471c621" providerId="ADAL" clId="{A54A5039-9BC6-1548-AC61-7314DB675A9D}" dt="2019-09-24T14:05:24.942" v="2839" actId="2696"/>
-        <pc:sldMkLst>
-          <pc:docMk/>
-          <pc:sldMk cId="2798321153" sldId="315"/>
-        </pc:sldMkLst>
-      </pc:sldChg>
-      <pc:sldChg chg="add">
-        <pc:chgData name="Long B Nguyen" userId="f59fb8f3-a021-417a-8bc1-65c8d471c621" providerId="ADAL" clId="{A54A5039-9BC6-1548-AC61-7314DB675A9D}" dt="2019-09-24T11:47:01.081" v="2186"/>
-        <pc:sldMkLst>
-          <pc:docMk/>
-          <pc:sldMk cId="1452600724" sldId="316"/>
-        </pc:sldMkLst>
-      </pc:sldChg>
-      <pc:sldChg chg="modSp add">
-        <pc:chgData name="Long B Nguyen" userId="f59fb8f3-a021-417a-8bc1-65c8d471c621" providerId="ADAL" clId="{A54A5039-9BC6-1548-AC61-7314DB675A9D}" dt="2019-09-25T14:26:33.714" v="2899" actId="20577"/>
-        <pc:sldMkLst>
-          <pc:docMk/>
-          <pc:sldMk cId="1787114790" sldId="317"/>
-        </pc:sldMkLst>
-      </pc:sldChg>
-      <pc:sldChg chg="modSp add">
-        <pc:chgData name="Long B Nguyen" userId="f59fb8f3-a021-417a-8bc1-65c8d471c621" providerId="ADAL" clId="{A54A5039-9BC6-1548-AC61-7314DB675A9D}" dt="2019-09-24T13:44:10.963" v="2838" actId="20577"/>
-        <pc:sldMkLst>
-          <pc:docMk/>
-          <pc:sldMk cId="1215229427" sldId="318"/>
-        </pc:sldMkLst>
-      </pc:sldChg>
-    </pc:docChg>
-  </pc:docChgLst>
-  <pc:docChgLst>
-    <pc:chgData name="Long B Nguyen" userId="f59fb8f3-a021-417a-8bc1-65c8d471c621" providerId="ADAL" clId="{7E551B6C-1E81-B548-A72C-C51786C7D0CC}"/>
-    <pc:docChg chg="custSel addSld delSld modSld">
-      <pc:chgData name="Long B Nguyen" userId="f59fb8f3-a021-417a-8bc1-65c8d471c621" providerId="ADAL" clId="{7E551B6C-1E81-B548-A72C-C51786C7D0CC}" dt="2021-06-11T17:34:49.741" v="4330" actId="2696"/>
-      <pc:docMkLst>
-        <pc:docMk/>
-      </pc:docMkLst>
-      <pc:sldChg chg="del">
-        <pc:chgData name="Long B Nguyen" userId="f59fb8f3-a021-417a-8bc1-65c8d471c621" providerId="ADAL" clId="{7E551B6C-1E81-B548-A72C-C51786C7D0CC}" dt="2021-06-11T17:34:49.741" v="4330" actId="2696"/>
-        <pc:sldMkLst>
-          <pc:docMk/>
-          <pc:sldMk cId="1758448129" sldId="309"/>
-        </pc:sldMkLst>
-      </pc:sldChg>
-      <pc:sldChg chg="modSp add mod modAnim">
-        <pc:chgData name="Long B Nguyen" userId="f59fb8f3-a021-417a-8bc1-65c8d471c621" providerId="ADAL" clId="{7E551B6C-1E81-B548-A72C-C51786C7D0CC}" dt="2021-06-11T12:17:07.088" v="2124" actId="20577"/>
-        <pc:sldMkLst>
-          <pc:docMk/>
-          <pc:sldMk cId="833801237" sldId="313"/>
-        </pc:sldMkLst>
-      </pc:sldChg>
-      <pc:sldChg chg="modSp del mod">
-        <pc:chgData name="Long B Nguyen" userId="f59fb8f3-a021-417a-8bc1-65c8d471c621" providerId="ADAL" clId="{7E551B6C-1E81-B548-A72C-C51786C7D0CC}" dt="2021-06-10T17:08:32.914" v="1371" actId="2696"/>
-        <pc:sldMkLst>
-          <pc:docMk/>
-          <pc:sldMk cId="3947558204" sldId="313"/>
-        </pc:sldMkLst>
-      </pc:sldChg>
-      <pc:sldChg chg="del">
-        <pc:chgData name="Long B Nguyen" userId="f59fb8f3-a021-417a-8bc1-65c8d471c621" providerId="ADAL" clId="{7E551B6C-1E81-B548-A72C-C51786C7D0CC}" dt="2021-06-10T17:02:53.723" v="1102" actId="2696"/>
-        <pc:sldMkLst>
-          <pc:docMk/>
-          <pc:sldMk cId="2054265466" sldId="314"/>
-        </pc:sldMkLst>
-      </pc:sldChg>
-      <pc:sldChg chg="modSp add mod">
-        <pc:chgData name="Long B Nguyen" userId="f59fb8f3-a021-417a-8bc1-65c8d471c621" providerId="ADAL" clId="{7E551B6C-1E81-B548-A72C-C51786C7D0CC}" dt="2021-06-11T12:17:35.863" v="2130" actId="255"/>
-        <pc:sldMkLst>
-          <pc:docMk/>
-          <pc:sldMk cId="4199940570" sldId="314"/>
-        </pc:sldMkLst>
-      </pc:sldChg>
-      <pc:sldChg chg="del">
-        <pc:chgData name="Long B Nguyen" userId="f59fb8f3-a021-417a-8bc1-65c8d471c621" providerId="ADAL" clId="{7E551B6C-1E81-B548-A72C-C51786C7D0CC}" dt="2021-06-10T17:02:53.787" v="1105" actId="2696"/>
-        <pc:sldMkLst>
-          <pc:docMk/>
-          <pc:sldMk cId="917461937" sldId="315"/>
-        </pc:sldMkLst>
-      </pc:sldChg>
-      <pc:sldChg chg="modSp add mod">
-        <pc:chgData name="Long B Nguyen" userId="f59fb8f3-a021-417a-8bc1-65c8d471c621" providerId="ADAL" clId="{7E551B6C-1E81-B548-A72C-C51786C7D0CC}" dt="2021-06-11T12:18:09.763" v="2139" actId="14100"/>
-        <pc:sldMkLst>
-          <pc:docMk/>
-          <pc:sldMk cId="1902012464" sldId="315"/>
-        </pc:sldMkLst>
-      </pc:sldChg>
-      <pc:sldChg chg="modSp add mod">
-        <pc:chgData name="Long B Nguyen" userId="f59fb8f3-a021-417a-8bc1-65c8d471c621" providerId="ADAL" clId="{7E551B6C-1E81-B548-A72C-C51786C7D0CC}" dt="2021-06-11T12:18:43.912" v="2147" actId="255"/>
-        <pc:sldMkLst>
-          <pc:docMk/>
-          <pc:sldMk cId="1824894821" sldId="316"/>
-        </pc:sldMkLst>
-      </pc:sldChg>
-      <pc:sldChg chg="del">
-        <pc:chgData name="Long B Nguyen" userId="f59fb8f3-a021-417a-8bc1-65c8d471c621" providerId="ADAL" clId="{7E551B6C-1E81-B548-A72C-C51786C7D0CC}" dt="2021-06-10T17:02:53.804" v="1106" actId="2696"/>
-        <pc:sldMkLst>
-          <pc:docMk/>
-          <pc:sldMk cId="3266234076" sldId="316"/>
-        </pc:sldMkLst>
-      </pc:sldChg>
-      <pc:sldChg chg="modSp add mod">
-        <pc:chgData name="Long B Nguyen" userId="f59fb8f3-a021-417a-8bc1-65c8d471c621" providerId="ADAL" clId="{7E551B6C-1E81-B548-A72C-C51786C7D0CC}" dt="2021-06-11T12:17:51.591" v="2133" actId="14100"/>
-        <pc:sldMkLst>
-          <pc:docMk/>
-          <pc:sldMk cId="1105327036" sldId="317"/>
-        </pc:sldMkLst>
-      </pc:sldChg>
-      <pc:sldChg chg="del">
-        <pc:chgData name="Long B Nguyen" userId="f59fb8f3-a021-417a-8bc1-65c8d471c621" providerId="ADAL" clId="{7E551B6C-1E81-B548-A72C-C51786C7D0CC}" dt="2021-06-10T17:02:53.738" v="1103" actId="2696"/>
-        <pc:sldMkLst>
-          <pc:docMk/>
-          <pc:sldMk cId="2886319738" sldId="317"/>
-        </pc:sldMkLst>
-      </pc:sldChg>
-      <pc:sldChg chg="modSp add mod">
-        <pc:chgData name="Long B Nguyen" userId="f59fb8f3-a021-417a-8bc1-65c8d471c621" providerId="ADAL" clId="{7E551B6C-1E81-B548-A72C-C51786C7D0CC}" dt="2021-06-11T12:19:10.483" v="2165" actId="14100"/>
-        <pc:sldMkLst>
-          <pc:docMk/>
-          <pc:sldMk cId="1694859685" sldId="319"/>
-        </pc:sldMkLst>
-      </pc:sldChg>
-      <pc:sldChg chg="del">
-        <pc:chgData name="Long B Nguyen" userId="f59fb8f3-a021-417a-8bc1-65c8d471c621" providerId="ADAL" clId="{7E551B6C-1E81-B548-A72C-C51786C7D0CC}" dt="2021-06-10T17:02:53.844" v="1108" actId="2696"/>
-        <pc:sldMkLst>
-          <pc:docMk/>
-          <pc:sldMk cId="3906700287" sldId="319"/>
-        </pc:sldMkLst>
-      </pc:sldChg>
-      <pc:sldChg chg="del">
-        <pc:chgData name="Long B Nguyen" userId="f59fb8f3-a021-417a-8bc1-65c8d471c621" providerId="ADAL" clId="{7E551B6C-1E81-B548-A72C-C51786C7D0CC}" dt="2021-06-10T17:02:53.989" v="1110" actId="2696"/>
-        <pc:sldMkLst>
-          <pc:docMk/>
-          <pc:sldMk cId="1810541734" sldId="320"/>
-        </pc:sldMkLst>
-      </pc:sldChg>
-      <pc:sldChg chg="modSp add mod">
-        <pc:chgData name="Long B Nguyen" userId="f59fb8f3-a021-417a-8bc1-65c8d471c621" providerId="ADAL" clId="{7E551B6C-1E81-B548-A72C-C51786C7D0CC}" dt="2021-06-11T12:19:53.077" v="2177" actId="20577"/>
-        <pc:sldMkLst>
-          <pc:docMk/>
-          <pc:sldMk cId="3981954340" sldId="320"/>
-        </pc:sldMkLst>
-      </pc:sldChg>
-      <pc:sldChg chg="del">
-        <pc:chgData name="Long B Nguyen" userId="f59fb8f3-a021-417a-8bc1-65c8d471c621" providerId="ADAL" clId="{7E551B6C-1E81-B548-A72C-C51786C7D0CC}" dt="2021-06-10T17:02:54.010" v="1111" actId="2696"/>
-        <pc:sldMkLst>
-          <pc:docMk/>
-          <pc:sldMk cId="1359731776" sldId="321"/>
-        </pc:sldMkLst>
-      </pc:sldChg>
-      <pc:sldChg chg="add">
-        <pc:chgData name="Long B Nguyen" userId="f59fb8f3-a021-417a-8bc1-65c8d471c621" providerId="ADAL" clId="{7E551B6C-1E81-B548-A72C-C51786C7D0CC}" dt="2021-06-10T17:03:02.443" v="1115"/>
-        <pc:sldMkLst>
-          <pc:docMk/>
-          <pc:sldMk cId="3869412028" sldId="321"/>
-        </pc:sldMkLst>
-      </pc:sldChg>
-      <pc:sldChg chg="modSp add mod">
-        <pc:chgData name="Long B Nguyen" userId="f59fb8f3-a021-417a-8bc1-65c8d471c621" providerId="ADAL" clId="{7E551B6C-1E81-B548-A72C-C51786C7D0CC}" dt="2021-06-11T12:20:03.206" v="2179" actId="1076"/>
-        <pc:sldMkLst>
-          <pc:docMk/>
-          <pc:sldMk cId="545779161" sldId="322"/>
-        </pc:sldMkLst>
-      </pc:sldChg>
-      <pc:sldChg chg="del">
-        <pc:chgData name="Long B Nguyen" userId="f59fb8f3-a021-417a-8bc1-65c8d471c621" providerId="ADAL" clId="{7E551B6C-1E81-B548-A72C-C51786C7D0CC}" dt="2021-06-10T17:02:54.030" v="1112" actId="2696"/>
-        <pc:sldMkLst>
-          <pc:docMk/>
-          <pc:sldMk cId="3651577480" sldId="322"/>
-        </pc:sldMkLst>
-      </pc:sldChg>
-      <pc:sldChg chg="del">
-        <pc:chgData name="Long B Nguyen" userId="f59fb8f3-a021-417a-8bc1-65c8d471c621" providerId="ADAL" clId="{7E551B6C-1E81-B548-A72C-C51786C7D0CC}" dt="2021-06-10T17:02:53.968" v="1109" actId="2696"/>
-        <pc:sldMkLst>
-          <pc:docMk/>
-          <pc:sldMk cId="1496564367" sldId="323"/>
-        </pc:sldMkLst>
-      </pc:sldChg>
-      <pc:sldChg chg="modSp add mod modAnim">
-        <pc:chgData name="Long B Nguyen" userId="f59fb8f3-a021-417a-8bc1-65c8d471c621" providerId="ADAL" clId="{7E551B6C-1E81-B548-A72C-C51786C7D0CC}" dt="2021-06-11T12:19:28.750" v="2171" actId="20577"/>
-        <pc:sldMkLst>
-          <pc:docMk/>
-          <pc:sldMk cId="3176068915" sldId="323"/>
-        </pc:sldMkLst>
-      </pc:sldChg>
-      <pc:sldChg chg="del">
-        <pc:chgData name="Long B Nguyen" userId="f59fb8f3-a021-417a-8bc1-65c8d471c621" providerId="ADAL" clId="{7E551B6C-1E81-B548-A72C-C51786C7D0CC}" dt="2021-06-10T17:08:30.582" v="1370" actId="2696"/>
-        <pc:sldMkLst>
-          <pc:docMk/>
-          <pc:sldMk cId="1025355635" sldId="325"/>
-        </pc:sldMkLst>
-      </pc:sldChg>
-      <pc:sldChg chg="del">
-        <pc:chgData name="Long B Nguyen" userId="f59fb8f3-a021-417a-8bc1-65c8d471c621" providerId="ADAL" clId="{7E551B6C-1E81-B548-A72C-C51786C7D0CC}" dt="2021-06-10T17:09:10.358" v="1375" actId="2696"/>
-        <pc:sldMkLst>
-          <pc:docMk/>
-          <pc:sldMk cId="4174920299" sldId="327"/>
-        </pc:sldMkLst>
-      </pc:sldChg>
-      <pc:sldChg chg="modSp add mod modAnim">
-        <pc:chgData name="Long B Nguyen" userId="f59fb8f3-a021-417a-8bc1-65c8d471c621" providerId="ADAL" clId="{7E551B6C-1E81-B548-A72C-C51786C7D0CC}" dt="2021-06-10T17:16:12.092" v="1739" actId="20577"/>
-        <pc:sldMkLst>
-          <pc:docMk/>
-          <pc:sldMk cId="2087798247" sldId="328"/>
-        </pc:sldMkLst>
-      </pc:sldChg>
-      <pc:sldChg chg="del">
-        <pc:chgData name="Long B Nguyen" userId="f59fb8f3-a021-417a-8bc1-65c8d471c621" providerId="ADAL" clId="{7E551B6C-1E81-B548-A72C-C51786C7D0CC}" dt="2021-06-10T13:17:07.707" v="800" actId="2696"/>
-        <pc:sldMkLst>
-          <pc:docMk/>
-          <pc:sldMk cId="2756462650" sldId="328"/>
-        </pc:sldMkLst>
-      </pc:sldChg>
-      <pc:sldChg chg="modSp add mod">
-        <pc:chgData name="Long B Nguyen" userId="f59fb8f3-a021-417a-8bc1-65c8d471c621" providerId="ADAL" clId="{7E551B6C-1E81-B548-A72C-C51786C7D0CC}" dt="2021-06-10T13:19:20.801" v="904" actId="1037"/>
-        <pc:sldMkLst>
-          <pc:docMk/>
-          <pc:sldMk cId="1447299358" sldId="329"/>
-        </pc:sldMkLst>
-      </pc:sldChg>
-      <pc:sldChg chg="del">
-        <pc:chgData name="Long B Nguyen" userId="f59fb8f3-a021-417a-8bc1-65c8d471c621" providerId="ADAL" clId="{7E551B6C-1E81-B548-A72C-C51786C7D0CC}" dt="2021-06-10T13:17:07.730" v="801" actId="2696"/>
-        <pc:sldMkLst>
-          <pc:docMk/>
-          <pc:sldMk cId="3080714931" sldId="329"/>
-        </pc:sldMkLst>
-      </pc:sldChg>
-      <pc:sldChg chg="del">
-        <pc:chgData name="Long B Nguyen" userId="f59fb8f3-a021-417a-8bc1-65c8d471c621" providerId="ADAL" clId="{7E551B6C-1E81-B548-A72C-C51786C7D0CC}" dt="2021-06-10T13:17:07.749" v="802" actId="2696"/>
-        <pc:sldMkLst>
-          <pc:docMk/>
-          <pc:sldMk cId="532184546" sldId="330"/>
-        </pc:sldMkLst>
-      </pc:sldChg>
-      <pc:sldChg chg="addSp modSp add del mod modAnim">
-        <pc:chgData name="Long B Nguyen" userId="f59fb8f3-a021-417a-8bc1-65c8d471c621" providerId="ADAL" clId="{7E551B6C-1E81-B548-A72C-C51786C7D0CC}" dt="2021-06-10T17:16:18.171" v="1740" actId="2696"/>
-        <pc:sldMkLst>
-          <pc:docMk/>
-          <pc:sldMk cId="3718226292" sldId="330"/>
-        </pc:sldMkLst>
-      </pc:sldChg>
-      <pc:sldChg chg="del">
-        <pc:chgData name="Long B Nguyen" userId="f59fb8f3-a021-417a-8bc1-65c8d471c621" providerId="ADAL" clId="{7E551B6C-1E81-B548-A72C-C51786C7D0CC}" dt="2021-06-10T13:17:07.770" v="803" actId="2696"/>
-        <pc:sldMkLst>
-          <pc:docMk/>
-          <pc:sldMk cId="3264629021" sldId="331"/>
-        </pc:sldMkLst>
-      </pc:sldChg>
-      <pc:sldChg chg="add del">
-        <pc:chgData name="Long B Nguyen" userId="f59fb8f3-a021-417a-8bc1-65c8d471c621" providerId="ADAL" clId="{7E551B6C-1E81-B548-A72C-C51786C7D0CC}" dt="2021-06-10T13:27:39.961" v="1055" actId="2696"/>
-        <pc:sldMkLst>
-          <pc:docMk/>
-          <pc:sldMk cId="4230691944" sldId="331"/>
-        </pc:sldMkLst>
-      </pc:sldChg>
-      <pc:sldChg chg="add del">
-        <pc:chgData name="Long B Nguyen" userId="f59fb8f3-a021-417a-8bc1-65c8d471c621" providerId="ADAL" clId="{7E551B6C-1E81-B548-A72C-C51786C7D0CC}" dt="2021-06-10T13:29:43.721" v="1097" actId="2696"/>
-        <pc:sldMkLst>
-          <pc:docMk/>
-          <pc:sldMk cId="2803662005" sldId="332"/>
-        </pc:sldMkLst>
-      </pc:sldChg>
-      <pc:sldChg chg="del">
-        <pc:chgData name="Long B Nguyen" userId="f59fb8f3-a021-417a-8bc1-65c8d471c621" providerId="ADAL" clId="{7E551B6C-1E81-B548-A72C-C51786C7D0CC}" dt="2021-06-10T13:17:07.831" v="806" actId="2696"/>
-        <pc:sldMkLst>
-          <pc:docMk/>
-          <pc:sldMk cId="4022722016" sldId="332"/>
-        </pc:sldMkLst>
-      </pc:sldChg>
-      <pc:sldChg chg="add del">
-        <pc:chgData name="Long B Nguyen" userId="f59fb8f3-a021-417a-8bc1-65c8d471c621" providerId="ADAL" clId="{7E551B6C-1E81-B548-A72C-C51786C7D0CC}" dt="2021-06-10T13:29:45.834" v="1098" actId="2696"/>
-        <pc:sldMkLst>
-          <pc:docMk/>
-          <pc:sldMk cId="1285018403" sldId="333"/>
-        </pc:sldMkLst>
-      </pc:sldChg>
-      <pc:sldChg chg="del">
-        <pc:chgData name="Long B Nguyen" userId="f59fb8f3-a021-417a-8bc1-65c8d471c621" providerId="ADAL" clId="{7E551B6C-1E81-B548-A72C-C51786C7D0CC}" dt="2021-06-10T13:17:07.851" v="807" actId="2696"/>
-        <pc:sldMkLst>
-          <pc:docMk/>
-          <pc:sldMk cId="1710208723" sldId="333"/>
-        </pc:sldMkLst>
-      </pc:sldChg>
-      <pc:sldChg chg="modSp add del mod">
-        <pc:chgData name="Long B Nguyen" userId="f59fb8f3-a021-417a-8bc1-65c8d471c621" providerId="ADAL" clId="{7E551B6C-1E81-B548-A72C-C51786C7D0CC}" dt="2021-06-10T17:03:59.471" v="1116" actId="2696"/>
-        <pc:sldMkLst>
-          <pc:docMk/>
-          <pc:sldMk cId="323835452" sldId="334"/>
-        </pc:sldMkLst>
-      </pc:sldChg>
-      <pc:sldChg chg="del">
-        <pc:chgData name="Long B Nguyen" userId="f59fb8f3-a021-417a-8bc1-65c8d471c621" providerId="ADAL" clId="{7E551B6C-1E81-B548-A72C-C51786C7D0CC}" dt="2021-06-10T13:17:07.813" v="805" actId="2696"/>
-        <pc:sldMkLst>
-          <pc:docMk/>
-          <pc:sldMk cId="3404583044" sldId="334"/>
-        </pc:sldMkLst>
-      </pc:sldChg>
-      <pc:sldChg chg="modSp add del mod modAnim">
-        <pc:chgData name="Long B Nguyen" userId="f59fb8f3-a021-417a-8bc1-65c8d471c621" providerId="ADAL" clId="{7E551B6C-1E81-B548-A72C-C51786C7D0CC}" dt="2021-06-10T17:16:19.100" v="1741" actId="2696"/>
-        <pc:sldMkLst>
-          <pc:docMk/>
-          <pc:sldMk cId="1198473218" sldId="335"/>
-        </pc:sldMkLst>
-      </pc:sldChg>
-      <pc:sldChg chg="del">
-        <pc:chgData name="Long B Nguyen" userId="f59fb8f3-a021-417a-8bc1-65c8d471c621" providerId="ADAL" clId="{7E551B6C-1E81-B548-A72C-C51786C7D0CC}" dt="2021-06-10T13:17:07.871" v="808" actId="2696"/>
-        <pc:sldMkLst>
-          <pc:docMk/>
-          <pc:sldMk cId="3866550465" sldId="335"/>
-        </pc:sldMkLst>
-      </pc:sldChg>
-      <pc:sldChg chg="modSp add del mod">
-        <pc:chgData name="Long B Nguyen" userId="f59fb8f3-a021-417a-8bc1-65c8d471c621" providerId="ADAL" clId="{7E551B6C-1E81-B548-A72C-C51786C7D0CC}" dt="2021-06-10T17:05:52.176" v="1254" actId="2696"/>
-        <pc:sldMkLst>
-          <pc:docMk/>
-          <pc:sldMk cId="2376304450" sldId="336"/>
-        </pc:sldMkLst>
-      </pc:sldChg>
-      <pc:sldChg chg="del">
-        <pc:chgData name="Long B Nguyen" userId="f59fb8f3-a021-417a-8bc1-65c8d471c621" providerId="ADAL" clId="{7E551B6C-1E81-B548-A72C-C51786C7D0CC}" dt="2021-06-10T13:17:07.893" v="809" actId="2696"/>
-        <pc:sldMkLst>
-          <pc:docMk/>
-          <pc:sldMk cId="3749436800" sldId="336"/>
-        </pc:sldMkLst>
-      </pc:sldChg>
-      <pc:sldChg chg="del">
-        <pc:chgData name="Long B Nguyen" userId="f59fb8f3-a021-417a-8bc1-65c8d471c621" providerId="ADAL" clId="{7E551B6C-1E81-B548-A72C-C51786C7D0CC}" dt="2021-06-10T13:17:07.914" v="810" actId="2696"/>
-        <pc:sldMkLst>
-          <pc:docMk/>
-          <pc:sldMk cId="461704868" sldId="337"/>
-        </pc:sldMkLst>
-      </pc:sldChg>
-      <pc:sldChg chg="modSp add del mod modAnim">
-        <pc:chgData name="Long B Nguyen" userId="f59fb8f3-a021-417a-8bc1-65c8d471c621" providerId="ADAL" clId="{7E551B6C-1E81-B548-A72C-C51786C7D0CC}" dt="2021-06-10T17:16:19.844" v="1742" actId="2696"/>
-        <pc:sldMkLst>
-          <pc:docMk/>
-          <pc:sldMk cId="2550687832" sldId="337"/>
-        </pc:sldMkLst>
-      </pc:sldChg>
-      <pc:sldChg chg="del">
-        <pc:chgData name="Long B Nguyen" userId="f59fb8f3-a021-417a-8bc1-65c8d471c621" providerId="ADAL" clId="{7E551B6C-1E81-B548-A72C-C51786C7D0CC}" dt="2021-06-10T13:17:07.933" v="811" actId="2696"/>
-        <pc:sldMkLst>
-          <pc:docMk/>
-          <pc:sldMk cId="545386500" sldId="338"/>
-        </pc:sldMkLst>
-      </pc:sldChg>
-      <pc:sldChg chg="add del">
-        <pc:chgData name="Long B Nguyen" userId="f59fb8f3-a021-417a-8bc1-65c8d471c621" providerId="ADAL" clId="{7E551B6C-1E81-B548-A72C-C51786C7D0CC}" dt="2021-06-10T17:16:20.569" v="1743" actId="2696"/>
-        <pc:sldMkLst>
-          <pc:docMk/>
-          <pc:sldMk cId="4192049539" sldId="338"/>
-        </pc:sldMkLst>
-      </pc:sldChg>
-      <pc:sldChg chg="del">
-        <pc:chgData name="Long B Nguyen" userId="f59fb8f3-a021-417a-8bc1-65c8d471c621" providerId="ADAL" clId="{7E551B6C-1E81-B548-A72C-C51786C7D0CC}" dt="2021-06-10T13:17:07.975" v="813" actId="2696"/>
-        <pc:sldMkLst>
-          <pc:docMk/>
-          <pc:sldMk cId="1791361008" sldId="339"/>
-        </pc:sldMkLst>
-      </pc:sldChg>
-      <pc:sldChg chg="add del">
-        <pc:chgData name="Long B Nguyen" userId="f59fb8f3-a021-417a-8bc1-65c8d471c621" providerId="ADAL" clId="{7E551B6C-1E81-B548-A72C-C51786C7D0CC}" dt="2021-06-10T17:06:33.035" v="1262" actId="2696"/>
-        <pc:sldMkLst>
-          <pc:docMk/>
-          <pc:sldMk cId="2215557265" sldId="339"/>
-        </pc:sldMkLst>
-      </pc:sldChg>
-      <pc:sldChg chg="del">
-        <pc:chgData name="Long B Nguyen" userId="f59fb8f3-a021-417a-8bc1-65c8d471c621" providerId="ADAL" clId="{7E551B6C-1E81-B548-A72C-C51786C7D0CC}" dt="2021-06-10T13:17:07.954" v="812" actId="2696"/>
-        <pc:sldMkLst>
-          <pc:docMk/>
-          <pc:sldMk cId="678299524" sldId="340"/>
-        </pc:sldMkLst>
-      </pc:sldChg>
-      <pc:sldChg chg="add del">
-        <pc:chgData name="Long B Nguyen" userId="f59fb8f3-a021-417a-8bc1-65c8d471c621" providerId="ADAL" clId="{7E551B6C-1E81-B548-A72C-C51786C7D0CC}" dt="2021-06-10T17:06:31.687" v="1261" actId="2696"/>
-        <pc:sldMkLst>
-          <pc:docMk/>
-          <pc:sldMk cId="3245902555" sldId="340"/>
-        </pc:sldMkLst>
-      </pc:sldChg>
-      <pc:sldChg chg="del">
-        <pc:chgData name="Long B Nguyen" userId="f59fb8f3-a021-417a-8bc1-65c8d471c621" providerId="ADAL" clId="{7E551B6C-1E81-B548-A72C-C51786C7D0CC}" dt="2021-06-10T13:17:08.002" v="814" actId="2696"/>
-        <pc:sldMkLst>
-          <pc:docMk/>
-          <pc:sldMk cId="225127645" sldId="341"/>
-        </pc:sldMkLst>
-      </pc:sldChg>
-      <pc:sldChg chg="modSp add del mod">
-        <pc:chgData name="Long B Nguyen" userId="f59fb8f3-a021-417a-8bc1-65c8d471c621" providerId="ADAL" clId="{7E551B6C-1E81-B548-A72C-C51786C7D0CC}" dt="2021-06-10T17:07:49.800" v="1368" actId="2696"/>
-        <pc:sldMkLst>
-          <pc:docMk/>
-          <pc:sldMk cId="3326640392" sldId="341"/>
-        </pc:sldMkLst>
-      </pc:sldChg>
-      <pc:sldChg chg="modSp add mod">
-        <pc:chgData name="Long B Nguyen" userId="f59fb8f3-a021-417a-8bc1-65c8d471c621" providerId="ADAL" clId="{7E551B6C-1E81-B548-A72C-C51786C7D0CC}" dt="2021-06-11T12:21:04.695" v="2199" actId="1076"/>
-        <pc:sldMkLst>
-          <pc:docMk/>
-          <pc:sldMk cId="1830555247" sldId="342"/>
-        </pc:sldMkLst>
-      </pc:sldChg>
-      <pc:sldChg chg="del">
-        <pc:chgData name="Long B Nguyen" userId="f59fb8f3-a021-417a-8bc1-65c8d471c621" providerId="ADAL" clId="{7E551B6C-1E81-B548-A72C-C51786C7D0CC}" dt="2021-06-10T17:02:54.078" v="1114" actId="2696"/>
-        <pc:sldMkLst>
-          <pc:docMk/>
-          <pc:sldMk cId="2214326257" sldId="342"/>
-        </pc:sldMkLst>
-      </pc:sldChg>
-      <pc:sldChg chg="del">
-        <pc:chgData name="Long B Nguyen" userId="f59fb8f3-a021-417a-8bc1-65c8d471c621" providerId="ADAL" clId="{7E551B6C-1E81-B548-A72C-C51786C7D0CC}" dt="2021-06-10T17:02:54.055" v="1113" actId="2696"/>
-        <pc:sldMkLst>
-          <pc:docMk/>
-          <pc:sldMk cId="1356056044" sldId="343"/>
-        </pc:sldMkLst>
-      </pc:sldChg>
-      <pc:sldChg chg="modSp add mod">
-        <pc:chgData name="Long B Nguyen" userId="f59fb8f3-a021-417a-8bc1-65c8d471c621" providerId="ADAL" clId="{7E551B6C-1E81-B548-A72C-C51786C7D0CC}" dt="2021-06-11T12:20:13.671" v="2183" actId="14100"/>
-        <pc:sldMkLst>
-          <pc:docMk/>
-          <pc:sldMk cId="2861772922" sldId="343"/>
-        </pc:sldMkLst>
-      </pc:sldChg>
-      <pc:sldChg chg="modSp mod">
-        <pc:chgData name="Long B Nguyen" userId="f59fb8f3-a021-417a-8bc1-65c8d471c621" providerId="ADAL" clId="{7E551B6C-1E81-B548-A72C-C51786C7D0CC}" dt="2021-06-11T15:53:57.641" v="3218" actId="20577"/>
-        <pc:sldMkLst>
-          <pc:docMk/>
-          <pc:sldMk cId="1270247652" sldId="344"/>
-        </pc:sldMkLst>
-      </pc:sldChg>
-      <pc:sldChg chg="del">
-        <pc:chgData name="Long B Nguyen" userId="f59fb8f3-a021-417a-8bc1-65c8d471c621" providerId="ADAL" clId="{7E551B6C-1E81-B548-A72C-C51786C7D0CC}" dt="2021-06-10T17:02:53.825" v="1107" actId="2696"/>
-        <pc:sldMkLst>
-          <pc:docMk/>
-          <pc:sldMk cId="902308803" sldId="345"/>
-        </pc:sldMkLst>
-      </pc:sldChg>
-      <pc:sldChg chg="modSp add mod">
-        <pc:chgData name="Long B Nguyen" userId="f59fb8f3-a021-417a-8bc1-65c8d471c621" providerId="ADAL" clId="{7E551B6C-1E81-B548-A72C-C51786C7D0CC}" dt="2021-06-11T12:18:57.762" v="2161" actId="1036"/>
-        <pc:sldMkLst>
-          <pc:docMk/>
-          <pc:sldMk cId="2130219534" sldId="345"/>
-        </pc:sldMkLst>
-      </pc:sldChg>
-      <pc:sldChg chg="add del">
-        <pc:chgData name="Long B Nguyen" userId="f59fb8f3-a021-417a-8bc1-65c8d471c621" providerId="ADAL" clId="{7E551B6C-1E81-B548-A72C-C51786C7D0CC}" dt="2021-06-10T13:28:50.891" v="1091" actId="2696"/>
-        <pc:sldMkLst>
-          <pc:docMk/>
-          <pc:sldMk cId="1198027455" sldId="346"/>
-        </pc:sldMkLst>
-      </pc:sldChg>
-      <pc:sldChg chg="del">
-        <pc:chgData name="Long B Nguyen" userId="f59fb8f3-a021-417a-8bc1-65c8d471c621" providerId="ADAL" clId="{7E551B6C-1E81-B548-A72C-C51786C7D0CC}" dt="2021-06-10T13:17:07.792" v="804" actId="2696"/>
-        <pc:sldMkLst>
-          <pc:docMk/>
-          <pc:sldMk cId="2271372051" sldId="346"/>
-        </pc:sldMkLst>
-      </pc:sldChg>
-      <pc:sldChg chg="modSp add mod">
-        <pc:chgData name="Long B Nguyen" userId="f59fb8f3-a021-417a-8bc1-65c8d471c621" providerId="ADAL" clId="{7E551B6C-1E81-B548-A72C-C51786C7D0CC}" dt="2021-06-11T12:17:58.259" v="2135" actId="1076"/>
-        <pc:sldMkLst>
-          <pc:docMk/>
-          <pc:sldMk cId="2921473555" sldId="348"/>
-        </pc:sldMkLst>
-      </pc:sldChg>
-      <pc:sldChg chg="del">
-        <pc:chgData name="Long B Nguyen" userId="f59fb8f3-a021-417a-8bc1-65c8d471c621" providerId="ADAL" clId="{7E551B6C-1E81-B548-A72C-C51786C7D0CC}" dt="2021-06-10T17:02:53.758" v="1104" actId="2696"/>
-        <pc:sldMkLst>
-          <pc:docMk/>
-          <pc:sldMk cId="3512088914" sldId="348"/>
-        </pc:sldMkLst>
-      </pc:sldChg>
-      <pc:sldChg chg="modSp mod">
-        <pc:chgData name="Long B Nguyen" userId="f59fb8f3-a021-417a-8bc1-65c8d471c621" providerId="ADAL" clId="{7E551B6C-1E81-B548-A72C-C51786C7D0CC}" dt="2021-06-10T12:21:09.053" v="37" actId="20577"/>
-        <pc:sldMkLst>
-          <pc:docMk/>
-          <pc:sldMk cId="1685712336" sldId="349"/>
-        </pc:sldMkLst>
-      </pc:sldChg>
-      <pc:sldChg chg="modSp add">
-        <pc:chgData name="Long B Nguyen" userId="f59fb8f3-a021-417a-8bc1-65c8d471c621" providerId="ADAL" clId="{7E551B6C-1E81-B548-A72C-C51786C7D0CC}" dt="2021-06-11T12:01:35.808" v="1748" actId="20577"/>
-        <pc:sldMkLst>
-          <pc:docMk/>
-          <pc:sldMk cId="1173183267" sldId="350"/>
-        </pc:sldMkLst>
-      </pc:sldChg>
-      <pc:sldChg chg="modSp add del mod modAnim">
-        <pc:chgData name="Long B Nguyen" userId="f59fb8f3-a021-417a-8bc1-65c8d471c621" providerId="ADAL" clId="{7E551B6C-1E81-B548-A72C-C51786C7D0CC}" dt="2021-06-10T13:03:10.803" v="496" actId="2696"/>
-        <pc:sldMkLst>
-          <pc:docMk/>
-          <pc:sldMk cId="1718290988" sldId="350"/>
-        </pc:sldMkLst>
-      </pc:sldChg>
-      <pc:sldChg chg="modSp add mod modAnim">
-        <pc:chgData name="Long B Nguyen" userId="f59fb8f3-a021-417a-8bc1-65c8d471c621" providerId="ADAL" clId="{7E551B6C-1E81-B548-A72C-C51786C7D0CC}" dt="2021-06-11T12:21:24.691" v="2200" actId="1076"/>
-        <pc:sldMkLst>
-          <pc:docMk/>
-          <pc:sldMk cId="1166836157" sldId="351"/>
-        </pc:sldMkLst>
-      </pc:sldChg>
-      <pc:sldChg chg="modSp add del modAnim">
-        <pc:chgData name="Long B Nguyen" userId="f59fb8f3-a021-417a-8bc1-65c8d471c621" providerId="ADAL" clId="{7E551B6C-1E81-B548-A72C-C51786C7D0CC}" dt="2021-06-10T13:08:38.854" v="566" actId="2696"/>
-        <pc:sldMkLst>
-          <pc:docMk/>
-          <pc:sldMk cId="486956964" sldId="352"/>
-        </pc:sldMkLst>
-      </pc:sldChg>
-      <pc:sldChg chg="delSp modSp add mod modAnim">
-        <pc:chgData name="Long B Nguyen" userId="f59fb8f3-a021-417a-8bc1-65c8d471c621" providerId="ADAL" clId="{7E551B6C-1E81-B548-A72C-C51786C7D0CC}" dt="2021-06-11T17:27:42.670" v="4039" actId="20577"/>
-        <pc:sldMkLst>
-          <pc:docMk/>
-          <pc:sldMk cId="630408664" sldId="598"/>
-        </pc:sldMkLst>
-      </pc:sldChg>
-      <pc:sldChg chg="add del">
-        <pc:chgData name="Long B Nguyen" userId="f59fb8f3-a021-417a-8bc1-65c8d471c621" providerId="ADAL" clId="{7E551B6C-1E81-B548-A72C-C51786C7D0CC}" dt="2021-06-11T17:22:36.725" v="3805" actId="2696"/>
-        <pc:sldMkLst>
-          <pc:docMk/>
-          <pc:sldMk cId="1612732867" sldId="598"/>
-        </pc:sldMkLst>
-      </pc:sldChg>
-      <pc:sldChg chg="add del">
-        <pc:chgData name="Long B Nguyen" userId="f59fb8f3-a021-417a-8bc1-65c8d471c621" providerId="ADAL" clId="{7E551B6C-1E81-B548-A72C-C51786C7D0CC}" dt="2021-06-11T17:30:54.363" v="4152" actId="2696"/>
-        <pc:sldMkLst>
-          <pc:docMk/>
-          <pc:sldMk cId="1257292635" sldId="599"/>
-        </pc:sldMkLst>
-      </pc:sldChg>
-      <pc:sldChg chg="addSp modSp add mod modAnim">
-        <pc:chgData name="Long B Nguyen" userId="f59fb8f3-a021-417a-8bc1-65c8d471c621" providerId="ADAL" clId="{7E551B6C-1E81-B548-A72C-C51786C7D0CC}" dt="2021-06-11T12:02:43.847" v="1765" actId="207"/>
-        <pc:sldMkLst>
-          <pc:docMk/>
-          <pc:sldMk cId="890660370" sldId="626"/>
-        </pc:sldMkLst>
-      </pc:sldChg>
-      <pc:sldChg chg="modSp add mod">
-        <pc:chgData name="Long B Nguyen" userId="f59fb8f3-a021-417a-8bc1-65c8d471c621" providerId="ADAL" clId="{7E551B6C-1E81-B548-A72C-C51786C7D0CC}" dt="2021-06-10T17:01:49.146" v="1101" actId="20577"/>
-        <pc:sldMkLst>
-          <pc:docMk/>
-          <pc:sldMk cId="3969006746" sldId="627"/>
-        </pc:sldMkLst>
-      </pc:sldChg>
-      <pc:sldChg chg="modSp add mod modAnim">
-        <pc:chgData name="Long B Nguyen" userId="f59fb8f3-a021-417a-8bc1-65c8d471c621" providerId="ADAL" clId="{7E551B6C-1E81-B548-A72C-C51786C7D0CC}" dt="2021-06-11T16:15:09.711" v="3219" actId="20577"/>
-        <pc:sldMkLst>
-          <pc:docMk/>
-          <pc:sldMk cId="781734240" sldId="628"/>
-        </pc:sldMkLst>
-      </pc:sldChg>
-      <pc:sldChg chg="addSp modSp add mod modAnim">
-        <pc:chgData name="Long B Nguyen" userId="f59fb8f3-a021-417a-8bc1-65c8d471c621" providerId="ADAL" clId="{7E551B6C-1E81-B548-A72C-C51786C7D0CC}" dt="2021-06-11T16:15:30.481" v="3246" actId="20577"/>
-        <pc:sldMkLst>
-          <pc:docMk/>
-          <pc:sldMk cId="4189100123" sldId="629"/>
-        </pc:sldMkLst>
-      </pc:sldChg>
-      <pc:sldChg chg="modSp add mod">
-        <pc:chgData name="Long B Nguyen" userId="f59fb8f3-a021-417a-8bc1-65c8d471c621" providerId="ADAL" clId="{7E551B6C-1E81-B548-A72C-C51786C7D0CC}" dt="2021-06-11T17:21:15.863" v="3803" actId="20577"/>
-        <pc:sldMkLst>
-          <pc:docMk/>
-          <pc:sldMk cId="3668115397" sldId="643"/>
-        </pc:sldMkLst>
-      </pc:sldChg>
-      <pc:sldChg chg="delSp modSp add mod">
-        <pc:chgData name="Long B Nguyen" userId="f59fb8f3-a021-417a-8bc1-65c8d471c621" providerId="ADAL" clId="{7E551B6C-1E81-B548-A72C-C51786C7D0CC}" dt="2021-06-11T16:51:13.848" v="3411" actId="20577"/>
-        <pc:sldMkLst>
-          <pc:docMk/>
-          <pc:sldMk cId="3323891907" sldId="647"/>
-        </pc:sldMkLst>
-      </pc:sldChg>
-      <pc:sldChg chg="modSp add mod">
-        <pc:chgData name="Long B Nguyen" userId="f59fb8f3-a021-417a-8bc1-65c8d471c621" providerId="ADAL" clId="{7E551B6C-1E81-B548-A72C-C51786C7D0CC}" dt="2021-06-11T17:18:06.386" v="3802" actId="20577"/>
-        <pc:sldMkLst>
-          <pc:docMk/>
-          <pc:sldMk cId="2605170431" sldId="648"/>
-        </pc:sldMkLst>
-      </pc:sldChg>
-      <pc:sldChg chg="addSp modSp add modAnim">
-        <pc:chgData name="Long B Nguyen" userId="f59fb8f3-a021-417a-8bc1-65c8d471c621" providerId="ADAL" clId="{7E551B6C-1E81-B548-A72C-C51786C7D0CC}" dt="2021-06-11T17:34:26.776" v="4329" actId="1036"/>
-        <pc:sldMkLst>
-          <pc:docMk/>
-          <pc:sldMk cId="1498021361" sldId="649"/>
-        </pc:sldMkLst>
-      </pc:sldChg>
-    </pc:docChg>
-  </pc:docChgLst>
-  <pc:docChgLst>
-    <pc:chgData name="Long B Nguyen" userId="f59fb8f3-a021-417a-8bc1-65c8d471c621" providerId="ADAL" clId="{6AC26564-89E3-E046-BFB4-F80582D7E17B}"/>
-    <pc:docChg chg="custSel addSld delSld modSld">
-      <pc:chgData name="Long B Nguyen" userId="f59fb8f3-a021-417a-8bc1-65c8d471c621" providerId="ADAL" clId="{6AC26564-89E3-E046-BFB4-F80582D7E17B}" dt="2020-01-16T12:56:30.213" v="1179"/>
-      <pc:docMkLst>
-        <pc:docMk/>
-      </pc:docMkLst>
-      <pc:sldChg chg="modSp">
-        <pc:chgData name="Long B Nguyen" userId="f59fb8f3-a021-417a-8bc1-65c8d471c621" providerId="ADAL" clId="{6AC26564-89E3-E046-BFB4-F80582D7E17B}" dt="2020-01-13T13:44:20.464" v="85" actId="20577"/>
-        <pc:sldMkLst>
-          <pc:docMk/>
-          <pc:sldMk cId="4247104139" sldId="256"/>
-        </pc:sldMkLst>
-      </pc:sldChg>
-      <pc:sldChg chg="add del">
-        <pc:chgData name="Long B Nguyen" userId="f59fb8f3-a021-417a-8bc1-65c8d471c621" providerId="ADAL" clId="{6AC26564-89E3-E046-BFB4-F80582D7E17B}" dt="2020-01-13T13:46:54.924" v="89" actId="2696"/>
-        <pc:sldMkLst>
-          <pc:docMk/>
-          <pc:sldMk cId="2869331202" sldId="257"/>
-        </pc:sldMkLst>
-      </pc:sldChg>
-      <pc:sldChg chg="modSp add">
-        <pc:chgData name="Long B Nguyen" userId="f59fb8f3-a021-417a-8bc1-65c8d471c621" providerId="ADAL" clId="{6AC26564-89E3-E046-BFB4-F80582D7E17B}" dt="2020-01-13T13:52:43.079" v="100" actId="2711"/>
-        <pc:sldMkLst>
-          <pc:docMk/>
-          <pc:sldMk cId="1758448129" sldId="309"/>
-        </pc:sldMkLst>
-      </pc:sldChg>
-      <pc:sldChg chg="modSp add del">
-        <pc:chgData name="Long B Nguyen" userId="f59fb8f3-a021-417a-8bc1-65c8d471c621" providerId="ADAL" clId="{6AC26564-89E3-E046-BFB4-F80582D7E17B}" dt="2020-01-13T13:46:55.484" v="90" actId="2696"/>
-        <pc:sldMkLst>
-          <pc:docMk/>
-          <pc:sldMk cId="174202529" sldId="310"/>
-        </pc:sldMkLst>
-      </pc:sldChg>
-      <pc:sldChg chg="add del">
-        <pc:chgData name="Long B Nguyen" userId="f59fb8f3-a021-417a-8bc1-65c8d471c621" providerId="ADAL" clId="{6AC26564-89E3-E046-BFB4-F80582D7E17B}" dt="2020-01-13T13:46:56.092" v="91" actId="2696"/>
-        <pc:sldMkLst>
-          <pc:docMk/>
-          <pc:sldMk cId="1098579697" sldId="311"/>
-        </pc:sldMkLst>
-      </pc:sldChg>
-      <pc:sldChg chg="add del">
-        <pc:chgData name="Long B Nguyen" userId="f59fb8f3-a021-417a-8bc1-65c8d471c621" providerId="ADAL" clId="{6AC26564-89E3-E046-BFB4-F80582D7E17B}" dt="2020-01-13T13:46:56.810" v="92" actId="2696"/>
-        <pc:sldMkLst>
-          <pc:docMk/>
-          <pc:sldMk cId="585175195" sldId="312"/>
-        </pc:sldMkLst>
-      </pc:sldChg>
-      <pc:sldChg chg="modSp add modAnim">
-        <pc:chgData name="Long B Nguyen" userId="f59fb8f3-a021-417a-8bc1-65c8d471c621" providerId="ADAL" clId="{6AC26564-89E3-E046-BFB4-F80582D7E17B}" dt="2020-01-13T14:05:02.598" v="149" actId="20577"/>
-        <pc:sldMkLst>
-          <pc:docMk/>
-          <pc:sldMk cId="3947558204" sldId="313"/>
-        </pc:sldMkLst>
-      </pc:sldChg>
-      <pc:sldChg chg="modSp add modAnim">
-        <pc:chgData name="Long B Nguyen" userId="f59fb8f3-a021-417a-8bc1-65c8d471c621" providerId="ADAL" clId="{6AC26564-89E3-E046-BFB4-F80582D7E17B}" dt="2020-01-16T12:46:51.559" v="758" actId="255"/>
-        <pc:sldMkLst>
-          <pc:docMk/>
-          <pc:sldMk cId="2054265466" sldId="314"/>
-        </pc:sldMkLst>
-      </pc:sldChg>
-      <pc:sldChg chg="modSp add modAnim">
-        <pc:chgData name="Long B Nguyen" userId="f59fb8f3-a021-417a-8bc1-65c8d471c621" providerId="ADAL" clId="{6AC26564-89E3-E046-BFB4-F80582D7E17B}" dt="2020-01-16T12:49:13.049" v="816" actId="255"/>
-        <pc:sldMkLst>
-          <pc:docMk/>
-          <pc:sldMk cId="917461937" sldId="315"/>
-        </pc:sldMkLst>
-      </pc:sldChg>
-      <pc:sldChg chg="del">
-        <pc:chgData name="Long B Nguyen" userId="f59fb8f3-a021-417a-8bc1-65c8d471c621" providerId="ADAL" clId="{6AC26564-89E3-E046-BFB4-F80582D7E17B}" dt="2020-01-13T13:43:17.195" v="13" actId="2696"/>
-        <pc:sldMkLst>
-          <pc:docMk/>
-          <pc:sldMk cId="1452600724" sldId="316"/>
-        </pc:sldMkLst>
-      </pc:sldChg>
-      <pc:sldChg chg="modSp add modAnim">
-        <pc:chgData name="Long B Nguyen" userId="f59fb8f3-a021-417a-8bc1-65c8d471c621" providerId="ADAL" clId="{6AC26564-89E3-E046-BFB4-F80582D7E17B}" dt="2020-01-16T12:49:23.670" v="817" actId="255"/>
-        <pc:sldMkLst>
-          <pc:docMk/>
-          <pc:sldMk cId="3266234076" sldId="316"/>
-        </pc:sldMkLst>
-      </pc:sldChg>
-      <pc:sldChg chg="addSp delSp modSp add">
-        <pc:chgData name="Long B Nguyen" userId="f59fb8f3-a021-417a-8bc1-65c8d471c621" providerId="ADAL" clId="{6AC26564-89E3-E046-BFB4-F80582D7E17B}" dt="2020-01-16T12:48:56.620" v="814" actId="20577"/>
-        <pc:sldMkLst>
-          <pc:docMk/>
-          <pc:sldMk cId="2886319738" sldId="317"/>
-        </pc:sldMkLst>
-      </pc:sldChg>
-      <pc:sldChg chg="del">
-        <pc:chgData name="Long B Nguyen" userId="f59fb8f3-a021-417a-8bc1-65c8d471c621" providerId="ADAL" clId="{6AC26564-89E3-E046-BFB4-F80582D7E17B}" dt="2020-01-13T13:43:16.993" v="0" actId="2696"/>
-        <pc:sldMkLst>
-          <pc:docMk/>
-          <pc:sldMk cId="924617162" sldId="319"/>
-        </pc:sldMkLst>
-      </pc:sldChg>
-      <pc:sldChg chg="modSp add modAnim">
-        <pc:chgData name="Long B Nguyen" userId="f59fb8f3-a021-417a-8bc1-65c8d471c621" providerId="ADAL" clId="{6AC26564-89E3-E046-BFB4-F80582D7E17B}" dt="2020-01-16T12:52:51.863" v="1123"/>
-        <pc:sldMkLst>
-          <pc:docMk/>
-          <pc:sldMk cId="3906700287" sldId="319"/>
-        </pc:sldMkLst>
-      </pc:sldChg>
-      <pc:sldChg chg="modSp add modAnim">
-        <pc:chgData name="Long B Nguyen" userId="f59fb8f3-a021-417a-8bc1-65c8d471c621" providerId="ADAL" clId="{6AC26564-89E3-E046-BFB4-F80582D7E17B}" dt="2020-01-16T12:53:13.597" v="1127"/>
-        <pc:sldMkLst>
-          <pc:docMk/>
-          <pc:sldMk cId="1810541734" sldId="320"/>
-        </pc:sldMkLst>
-      </pc:sldChg>
-      <pc:sldChg chg="del">
-        <pc:chgData name="Long B Nguyen" userId="f59fb8f3-a021-417a-8bc1-65c8d471c621" providerId="ADAL" clId="{6AC26564-89E3-E046-BFB4-F80582D7E17B}" dt="2020-01-13T13:43:17.009" v="1" actId="2696"/>
-        <pc:sldMkLst>
-          <pc:docMk/>
-          <pc:sldMk cId="3758830494" sldId="320"/>
-        </pc:sldMkLst>
-      </pc:sldChg>
-      <pc:sldChg chg="del">
-        <pc:chgData name="Long B Nguyen" userId="f59fb8f3-a021-417a-8bc1-65c8d471c621" providerId="ADAL" clId="{6AC26564-89E3-E046-BFB4-F80582D7E17B}" dt="2020-01-13T13:43:17.029" v="2" actId="2696"/>
-        <pc:sldMkLst>
-          <pc:docMk/>
-          <pc:sldMk cId="1022945305" sldId="321"/>
-        </pc:sldMkLst>
-      </pc:sldChg>
-      <pc:sldChg chg="add">
-        <pc:chgData name="Long B Nguyen" userId="f59fb8f3-a021-417a-8bc1-65c8d471c621" providerId="ADAL" clId="{6AC26564-89E3-E046-BFB4-F80582D7E17B}" dt="2020-01-13T13:43:29.420" v="22"/>
-        <pc:sldMkLst>
-          <pc:docMk/>
-          <pc:sldMk cId="1359731776" sldId="321"/>
-        </pc:sldMkLst>
-      </pc:sldChg>
-      <pc:sldChg chg="del">
-        <pc:chgData name="Long B Nguyen" userId="f59fb8f3-a021-417a-8bc1-65c8d471c621" providerId="ADAL" clId="{6AC26564-89E3-E046-BFB4-F80582D7E17B}" dt="2020-01-13T13:43:17.080" v="5" actId="2696"/>
-        <pc:sldMkLst>
-          <pc:docMk/>
-          <pc:sldMk cId="3456840474" sldId="322"/>
-        </pc:sldMkLst>
-      </pc:sldChg>
-      <pc:sldChg chg="add">
-        <pc:chgData name="Long B Nguyen" userId="f59fb8f3-a021-417a-8bc1-65c8d471c621" providerId="ADAL" clId="{6AC26564-89E3-E046-BFB4-F80582D7E17B}" dt="2020-01-13T13:43:29.420" v="22"/>
-        <pc:sldMkLst>
-          <pc:docMk/>
-          <pc:sldMk cId="3651577480" sldId="322"/>
-        </pc:sldMkLst>
-      </pc:sldChg>
-      <pc:sldChg chg="del">
-        <pc:chgData name="Long B Nguyen" userId="f59fb8f3-a021-417a-8bc1-65c8d471c621" providerId="ADAL" clId="{6AC26564-89E3-E046-BFB4-F80582D7E17B}" dt="2020-01-13T13:43:17.097" v="6" actId="2696"/>
-        <pc:sldMkLst>
-          <pc:docMk/>
-          <pc:sldMk cId="1062075874" sldId="323"/>
-        </pc:sldMkLst>
-      </pc:sldChg>
-      <pc:sldChg chg="add">
-        <pc:chgData name="Long B Nguyen" userId="f59fb8f3-a021-417a-8bc1-65c8d471c621" providerId="ADAL" clId="{6AC26564-89E3-E046-BFB4-F80582D7E17B}" dt="2020-01-13T13:43:29.420" v="22"/>
-        <pc:sldMkLst>
-          <pc:docMk/>
-          <pc:sldMk cId="1496564367" sldId="323"/>
-        </pc:sldMkLst>
-      </pc:sldChg>
-      <pc:sldChg chg="add del">
-        <pc:chgData name="Long B Nguyen" userId="f59fb8f3-a021-417a-8bc1-65c8d471c621" providerId="ADAL" clId="{6AC26564-89E3-E046-BFB4-F80582D7E17B}" dt="2020-01-13T13:49:58.463" v="94" actId="2696"/>
-        <pc:sldMkLst>
-          <pc:docMk/>
-          <pc:sldMk cId="771866096" sldId="324"/>
-        </pc:sldMkLst>
-      </pc:sldChg>
-      <pc:sldChg chg="del">
-        <pc:chgData name="Long B Nguyen" userId="f59fb8f3-a021-417a-8bc1-65c8d471c621" providerId="ADAL" clId="{6AC26564-89E3-E046-BFB4-F80582D7E17B}" dt="2020-01-13T13:43:17.152" v="9" actId="2696"/>
-        <pc:sldMkLst>
-          <pc:docMk/>
-          <pc:sldMk cId="1310010799" sldId="324"/>
-        </pc:sldMkLst>
-      </pc:sldChg>
-      <pc:sldChg chg="add del">
-        <pc:chgData name="Long B Nguyen" userId="f59fb8f3-a021-417a-8bc1-65c8d471c621" providerId="ADAL" clId="{6AC26564-89E3-E046-BFB4-F80582D7E17B}" dt="2020-01-13T13:46:07.690" v="87" actId="2696"/>
-        <pc:sldMkLst>
-          <pc:docMk/>
-          <pc:sldMk cId="3999804732" sldId="324"/>
-        </pc:sldMkLst>
-      </pc:sldChg>
-      <pc:sldChg chg="add">
-        <pc:chgData name="Long B Nguyen" userId="f59fb8f3-a021-417a-8bc1-65c8d471c621" providerId="ADAL" clId="{6AC26564-89E3-E046-BFB4-F80582D7E17B}" dt="2020-01-13T13:43:29.420" v="22"/>
-        <pc:sldMkLst>
-          <pc:docMk/>
-          <pc:sldMk cId="1025355635" sldId="325"/>
-        </pc:sldMkLst>
-      </pc:sldChg>
-      <pc:sldChg chg="del">
-        <pc:chgData name="Long B Nguyen" userId="f59fb8f3-a021-417a-8bc1-65c8d471c621" providerId="ADAL" clId="{6AC26564-89E3-E046-BFB4-F80582D7E17B}" dt="2020-01-13T13:43:17.177" v="11" actId="2696"/>
-        <pc:sldMkLst>
-          <pc:docMk/>
-          <pc:sldMk cId="3314372952" sldId="325"/>
-        </pc:sldMkLst>
-      </pc:sldChg>
-      <pc:sldChg chg="del">
-        <pc:chgData name="Long B Nguyen" userId="f59fb8f3-a021-417a-8bc1-65c8d471c621" providerId="ADAL" clId="{6AC26564-89E3-E046-BFB4-F80582D7E17B}" dt="2020-01-13T13:43:17.116" v="7" actId="2696"/>
-        <pc:sldMkLst>
-          <pc:docMk/>
-          <pc:sldMk cId="1724104636" sldId="327"/>
-        </pc:sldMkLst>
-      </pc:sldChg>
-      <pc:sldChg chg="modSp add">
-        <pc:chgData name="Long B Nguyen" userId="f59fb8f3-a021-417a-8bc1-65c8d471c621" providerId="ADAL" clId="{6AC26564-89E3-E046-BFB4-F80582D7E17B}" dt="2020-01-16T12:53:51.150" v="1128" actId="1076"/>
-        <pc:sldMkLst>
-          <pc:docMk/>
-          <pc:sldMk cId="4174920299" sldId="327"/>
-        </pc:sldMkLst>
-      </pc:sldChg>
-      <pc:sldChg chg="add">
-        <pc:chgData name="Long B Nguyen" userId="f59fb8f3-a021-417a-8bc1-65c8d471c621" providerId="ADAL" clId="{6AC26564-89E3-E046-BFB4-F80582D7E17B}" dt="2020-01-13T13:43:29.420" v="22"/>
-        <pc:sldMkLst>
-          <pc:docMk/>
-          <pc:sldMk cId="2756462650" sldId="328"/>
-        </pc:sldMkLst>
-      </pc:sldChg>
-      <pc:sldChg chg="del">
-        <pc:chgData name="Long B Nguyen" userId="f59fb8f3-a021-417a-8bc1-65c8d471c621" providerId="ADAL" clId="{6AC26564-89E3-E046-BFB4-F80582D7E17B}" dt="2020-01-13T13:43:17.045" v="3" actId="2696"/>
-        <pc:sldMkLst>
-          <pc:docMk/>
-          <pc:sldMk cId="3894299887" sldId="328"/>
-        </pc:sldMkLst>
-      </pc:sldChg>
-      <pc:sldChg chg="addSp modSp add modAnim">
-        <pc:chgData name="Long B Nguyen" userId="f59fb8f3-a021-417a-8bc1-65c8d471c621" providerId="ADAL" clId="{6AC26564-89E3-E046-BFB4-F80582D7E17B}" dt="2020-01-16T12:55:13.445" v="1133"/>
-        <pc:sldMkLst>
-          <pc:docMk/>
-          <pc:sldMk cId="3080714931" sldId="329"/>
-        </pc:sldMkLst>
-      </pc:sldChg>
-      <pc:sldChg chg="del">
-        <pc:chgData name="Long B Nguyen" userId="f59fb8f3-a021-417a-8bc1-65c8d471c621" providerId="ADAL" clId="{6AC26564-89E3-E046-BFB4-F80582D7E17B}" dt="2020-01-13T13:43:17.064" v="4" actId="2696"/>
-        <pc:sldMkLst>
-          <pc:docMk/>
-          <pc:sldMk cId="4294143140" sldId="329"/>
-        </pc:sldMkLst>
-      </pc:sldChg>
-      <pc:sldChg chg="modSp add">
-        <pc:chgData name="Long B Nguyen" userId="f59fb8f3-a021-417a-8bc1-65c8d471c621" providerId="ADAL" clId="{6AC26564-89E3-E046-BFB4-F80582D7E17B}" dt="2020-01-16T12:55:29.239" v="1161" actId="20577"/>
-        <pc:sldMkLst>
-          <pc:docMk/>
-          <pc:sldMk cId="532184546" sldId="330"/>
-        </pc:sldMkLst>
-      </pc:sldChg>
-      <pc:sldChg chg="del">
-        <pc:chgData name="Long B Nguyen" userId="f59fb8f3-a021-417a-8bc1-65c8d471c621" providerId="ADAL" clId="{6AC26564-89E3-E046-BFB4-F80582D7E17B}" dt="2020-01-13T13:43:17.136" v="8" actId="2696"/>
-        <pc:sldMkLst>
-          <pc:docMk/>
-          <pc:sldMk cId="3594730708" sldId="330"/>
-        </pc:sldMkLst>
-      </pc:sldChg>
-      <pc:sldChg chg="modSp add">
-        <pc:chgData name="Long B Nguyen" userId="f59fb8f3-a021-417a-8bc1-65c8d471c621" providerId="ADAL" clId="{6AC26564-89E3-E046-BFB4-F80582D7E17B}" dt="2020-01-16T12:55:34.788" v="1174" actId="20577"/>
-        <pc:sldMkLst>
-          <pc:docMk/>
-          <pc:sldMk cId="3264629021" sldId="331"/>
-        </pc:sldMkLst>
-      </pc:sldChg>
-      <pc:sldChg chg="del">
-        <pc:chgData name="Long B Nguyen" userId="f59fb8f3-a021-417a-8bc1-65c8d471c621" providerId="ADAL" clId="{6AC26564-89E3-E046-BFB4-F80582D7E17B}" dt="2020-01-13T13:43:17.188" v="12" actId="2696"/>
-        <pc:sldMkLst>
-          <pc:docMk/>
-          <pc:sldMk cId="3870816631" sldId="331"/>
-        </pc:sldMkLst>
-      </pc:sldChg>
-      <pc:sldChg chg="del">
-        <pc:chgData name="Long B Nguyen" userId="f59fb8f3-a021-417a-8bc1-65c8d471c621" providerId="ADAL" clId="{6AC26564-89E3-E046-BFB4-F80582D7E17B}" dt="2020-01-13T13:43:17.163" v="10" actId="2696"/>
-        <pc:sldMkLst>
-          <pc:docMk/>
-          <pc:sldMk cId="3124353102" sldId="332"/>
-        </pc:sldMkLst>
-      </pc:sldChg>
-      <pc:sldChg chg="modSp add">
-        <pc:chgData name="Long B Nguyen" userId="f59fb8f3-a021-417a-8bc1-65c8d471c621" providerId="ADAL" clId="{6AC26564-89E3-E046-BFB4-F80582D7E17B}" dt="2020-01-13T14:18:10.052" v="509" actId="20577"/>
-        <pc:sldMkLst>
-          <pc:docMk/>
-          <pc:sldMk cId="4022722016" sldId="332"/>
-        </pc:sldMkLst>
-      </pc:sldChg>
-      <pc:sldChg chg="add">
-        <pc:chgData name="Long B Nguyen" userId="f59fb8f3-a021-417a-8bc1-65c8d471c621" providerId="ADAL" clId="{6AC26564-89E3-E046-BFB4-F80582D7E17B}" dt="2020-01-13T13:43:29.420" v="22"/>
-        <pc:sldMkLst>
-          <pc:docMk/>
-          <pc:sldMk cId="1710208723" sldId="333"/>
-        </pc:sldMkLst>
-      </pc:sldChg>
-      <pc:sldChg chg="add">
-        <pc:chgData name="Long B Nguyen" userId="f59fb8f3-a021-417a-8bc1-65c8d471c621" providerId="ADAL" clId="{6AC26564-89E3-E046-BFB4-F80582D7E17B}" dt="2020-01-13T13:43:29.420" v="22"/>
-        <pc:sldMkLst>
-          <pc:docMk/>
-          <pc:sldMk cId="3404583044" sldId="334"/>
-        </pc:sldMkLst>
-      </pc:sldChg>
-      <pc:sldChg chg="add">
-        <pc:chgData name="Long B Nguyen" userId="f59fb8f3-a021-417a-8bc1-65c8d471c621" providerId="ADAL" clId="{6AC26564-89E3-E046-BFB4-F80582D7E17B}" dt="2020-01-13T13:43:29.420" v="22"/>
-        <pc:sldMkLst>
-          <pc:docMk/>
-          <pc:sldMk cId="3866550465" sldId="335"/>
-        </pc:sldMkLst>
-      </pc:sldChg>
-      <pc:sldChg chg="add">
-        <pc:chgData name="Long B Nguyen" userId="f59fb8f3-a021-417a-8bc1-65c8d471c621" providerId="ADAL" clId="{6AC26564-89E3-E046-BFB4-F80582D7E17B}" dt="2020-01-13T13:43:29.420" v="22"/>
-        <pc:sldMkLst>
-          <pc:docMk/>
-          <pc:sldMk cId="3749436800" sldId="336"/>
-        </pc:sldMkLst>
-      </pc:sldChg>
-      <pc:sldChg chg="add">
-        <pc:chgData name="Long B Nguyen" userId="f59fb8f3-a021-417a-8bc1-65c8d471c621" providerId="ADAL" clId="{6AC26564-89E3-E046-BFB4-F80582D7E17B}" dt="2020-01-13T13:43:29.420" v="22"/>
-        <pc:sldMkLst>
-          <pc:docMk/>
-          <pc:sldMk cId="461704868" sldId="337"/>
-        </pc:sldMkLst>
-      </pc:sldChg>
-      <pc:sldChg chg="add modAnim">
-        <pc:chgData name="Long B Nguyen" userId="f59fb8f3-a021-417a-8bc1-65c8d471c621" providerId="ADAL" clId="{6AC26564-89E3-E046-BFB4-F80582D7E17B}" dt="2020-01-16T12:56:30.213" v="1179"/>
-        <pc:sldMkLst>
-          <pc:docMk/>
-          <pc:sldMk cId="545386500" sldId="338"/>
-        </pc:sldMkLst>
-      </pc:sldChg>
-      <pc:sldChg chg="add">
-        <pc:chgData name="Long B Nguyen" userId="f59fb8f3-a021-417a-8bc1-65c8d471c621" providerId="ADAL" clId="{6AC26564-89E3-E046-BFB4-F80582D7E17B}" dt="2020-01-13T13:43:29.420" v="22"/>
-        <pc:sldMkLst>
-          <pc:docMk/>
-          <pc:sldMk cId="1791361008" sldId="339"/>
-        </pc:sldMkLst>
-      </pc:sldChg>
-      <pc:sldChg chg="modSp add modAnim">
-        <pc:chgData name="Long B Nguyen" userId="f59fb8f3-a021-417a-8bc1-65c8d471c621" providerId="ADAL" clId="{6AC26564-89E3-E046-BFB4-F80582D7E17B}" dt="2020-01-16T12:56:22.622" v="1178"/>
-        <pc:sldMkLst>
-          <pc:docMk/>
-          <pc:sldMk cId="678299524" sldId="340"/>
-        </pc:sldMkLst>
-      </pc:sldChg>
-      <pc:sldChg chg="modSp add modAnim">
-        <pc:chgData name="Long B Nguyen" userId="f59fb8f3-a021-417a-8bc1-65c8d471c621" providerId="ADAL" clId="{6AC26564-89E3-E046-BFB4-F80582D7E17B}" dt="2020-01-13T14:19:32.433" v="590" actId="20577"/>
-        <pc:sldMkLst>
-          <pc:docMk/>
-          <pc:sldMk cId="225127645" sldId="341"/>
-        </pc:sldMkLst>
-      </pc:sldChg>
-      <pc:sldChg chg="add">
-        <pc:chgData name="Long B Nguyen" userId="f59fb8f3-a021-417a-8bc1-65c8d471c621" providerId="ADAL" clId="{6AC26564-89E3-E046-BFB4-F80582D7E17B}" dt="2020-01-13T13:43:29.420" v="22"/>
-        <pc:sldMkLst>
-          <pc:docMk/>
-          <pc:sldMk cId="2214326257" sldId="342"/>
-        </pc:sldMkLst>
-      </pc:sldChg>
-      <pc:sldChg chg="modSp add">
-        <pc:chgData name="Long B Nguyen" userId="f59fb8f3-a021-417a-8bc1-65c8d471c621" providerId="ADAL" clId="{6AC26564-89E3-E046-BFB4-F80582D7E17B}" dt="2020-01-14T14:43:22.774" v="624" actId="20577"/>
-        <pc:sldMkLst>
-          <pc:docMk/>
-          <pc:sldMk cId="1356056044" sldId="343"/>
-        </pc:sldMkLst>
-      </pc:sldChg>
-      <pc:sldChg chg="modSp add">
-        <pc:chgData name="Long B Nguyen" userId="f59fb8f3-a021-417a-8bc1-65c8d471c621" providerId="ADAL" clId="{6AC26564-89E3-E046-BFB4-F80582D7E17B}" dt="2020-01-13T13:52:32.924" v="99" actId="2711"/>
-        <pc:sldMkLst>
-          <pc:docMk/>
-          <pc:sldMk cId="1270247652" sldId="344"/>
-        </pc:sldMkLst>
-      </pc:sldChg>
-      <pc:sldChg chg="modSp add modAnim">
-        <pc:chgData name="Long B Nguyen" userId="f59fb8f3-a021-417a-8bc1-65c8d471c621" providerId="ADAL" clId="{6AC26564-89E3-E046-BFB4-F80582D7E17B}" dt="2020-01-16T12:52:56.169" v="1124"/>
-        <pc:sldMkLst>
-          <pc:docMk/>
-          <pc:sldMk cId="902308803" sldId="345"/>
-        </pc:sldMkLst>
-      </pc:sldChg>
-      <pc:sldChg chg="add">
-        <pc:chgData name="Long B Nguyen" userId="f59fb8f3-a021-417a-8bc1-65c8d471c621" providerId="ADAL" clId="{6AC26564-89E3-E046-BFB4-F80582D7E17B}" dt="2020-01-13T13:43:29.420" v="22"/>
-        <pc:sldMkLst>
-          <pc:docMk/>
-          <pc:sldMk cId="2271372051" sldId="346"/>
-        </pc:sldMkLst>
-      </pc:sldChg>
-      <pc:sldChg chg="add del">
-        <pc:chgData name="Long B Nguyen" userId="f59fb8f3-a021-417a-8bc1-65c8d471c621" providerId="ADAL" clId="{6AC26564-89E3-E046-BFB4-F80582D7E17B}" dt="2020-01-13T13:49:58.453" v="93" actId="2696"/>
-        <pc:sldMkLst>
-          <pc:docMk/>
-          <pc:sldMk cId="198078322" sldId="347"/>
-        </pc:sldMkLst>
-      </pc:sldChg>
-      <pc:sldChg chg="modSp add">
-        <pc:chgData name="Long B Nguyen" userId="f59fb8f3-a021-417a-8bc1-65c8d471c621" providerId="ADAL" clId="{6AC26564-89E3-E046-BFB4-F80582D7E17B}" dt="2020-01-14T14:41:50.033" v="591" actId="1076"/>
-        <pc:sldMkLst>
-          <pc:docMk/>
-          <pc:sldMk cId="3556500226" sldId="347"/>
-        </pc:sldMkLst>
-      </pc:sldChg>
-      <pc:sldChg chg="addSp delSp modSp add">
-        <pc:chgData name="Long B Nguyen" userId="f59fb8f3-a021-417a-8bc1-65c8d471c621" providerId="ADAL" clId="{6AC26564-89E3-E046-BFB4-F80582D7E17B}" dt="2020-01-16T12:48:48.788" v="791" actId="20577"/>
-        <pc:sldMkLst>
-          <pc:docMk/>
-          <pc:sldMk cId="3512088914" sldId="348"/>
-        </pc:sldMkLst>
-      </pc:sldChg>
-    </pc:docChg>
-  </pc:docChgLst>
-  <pc:docChgLst>
-    <pc:chgData name="Long B Nguyen" userId="f59fb8f3-a021-417a-8bc1-65c8d471c621" providerId="ADAL" clId="{93BB9880-C423-7B4F-8EAD-EF280601F408}"/>
-    <pc:docChg chg="addSld modSld">
-      <pc:chgData name="Long B Nguyen" userId="f59fb8f3-a021-417a-8bc1-65c8d471c621" providerId="ADAL" clId="{93BB9880-C423-7B4F-8EAD-EF280601F408}" dt="2024-11-23T13:04:08.775" v="50" actId="1076"/>
-      <pc:docMkLst>
-        <pc:docMk/>
-      </pc:docMkLst>
-      <pc:sldChg chg="addSp delSp modSp add mod modAnim">
-        <pc:chgData name="Long B Nguyen" userId="f59fb8f3-a021-417a-8bc1-65c8d471c621" providerId="ADAL" clId="{93BB9880-C423-7B4F-8EAD-EF280601F408}" dt="2024-11-23T13:04:08.775" v="50" actId="1076"/>
-        <pc:sldMkLst>
-          <pc:docMk/>
-          <pc:sldMk cId="1978195169" sldId="634"/>
-        </pc:sldMkLst>
-        <pc:spChg chg="mod">
-          <ac:chgData name="Long B Nguyen" userId="f59fb8f3-a021-417a-8bc1-65c8d471c621" providerId="ADAL" clId="{93BB9880-C423-7B4F-8EAD-EF280601F408}" dt="2024-11-23T13:03:31.274" v="40" actId="20577"/>
-          <ac:spMkLst>
-            <pc:docMk/>
-            <pc:sldMk cId="1978195169" sldId="634"/>
-            <ac:spMk id="16386" creationId="{EEB3325B-373F-D81A-55F3-2633F3E0D5D2}"/>
-          </ac:spMkLst>
-        </pc:spChg>
-        <pc:spChg chg="mod">
-          <ac:chgData name="Long B Nguyen" userId="f59fb8f3-a021-417a-8bc1-65c8d471c621" providerId="ADAL" clId="{93BB9880-C423-7B4F-8EAD-EF280601F408}" dt="2024-11-23T13:03:25.051" v="39" actId="20577"/>
-          <ac:spMkLst>
-            <pc:docMk/>
-            <pc:sldMk cId="1978195169" sldId="634"/>
-            <ac:spMk id="22529" creationId="{87EA8C7D-4BDB-2F51-9763-A78F04930C44}"/>
-          </ac:spMkLst>
-        </pc:spChg>
-        <pc:picChg chg="add mod">
-          <ac:chgData name="Long B Nguyen" userId="f59fb8f3-a021-417a-8bc1-65c8d471c621" providerId="ADAL" clId="{93BB9880-C423-7B4F-8EAD-EF280601F408}" dt="2024-11-23T13:04:07.408" v="49" actId="1076"/>
-          <ac:picMkLst>
-            <pc:docMk/>
-            <pc:sldMk cId="1978195169" sldId="634"/>
-            <ac:picMk id="2" creationId="{B94D8BFC-5C84-2B21-1B7D-0D613CCC9F36}"/>
-          </ac:picMkLst>
-        </pc:picChg>
-        <pc:picChg chg="mod">
-          <ac:chgData name="Long B Nguyen" userId="f59fb8f3-a021-417a-8bc1-65c8d471c621" providerId="ADAL" clId="{93BB9880-C423-7B4F-8EAD-EF280601F408}" dt="2024-11-23T13:04:08.775" v="50" actId="1076"/>
-          <ac:picMkLst>
-            <pc:docMk/>
-            <pc:sldMk cId="1978195169" sldId="634"/>
-            <ac:picMk id="5" creationId="{1EC1BD21-EC59-1698-A41E-A0BE9D1FB4FE}"/>
-          </ac:picMkLst>
-        </pc:picChg>
-        <pc:picChg chg="del">
-          <ac:chgData name="Long B Nguyen" userId="f59fb8f3-a021-417a-8bc1-65c8d471c621" providerId="ADAL" clId="{93BB9880-C423-7B4F-8EAD-EF280601F408}" dt="2024-11-23T13:03:36.023" v="42" actId="478"/>
-          <ac:picMkLst>
-            <pc:docMk/>
-            <pc:sldMk cId="1978195169" sldId="634"/>
-            <ac:picMk id="22531" creationId="{07121045-BFA5-5C3C-4AE7-2BCCC5A05219}"/>
-          </ac:picMkLst>
-        </pc:picChg>
-      </pc:sldChg>
-    </pc:docChg>
-  </pc:docChgLst>
-  <pc:docChgLst>
-    <pc:chgData name="Long B Nguyen" userId="f59fb8f3-a021-417a-8bc1-65c8d471c621" providerId="ADAL" clId="{B1BC82AE-0B84-6345-94DD-50FF764891EB}"/>
-    <pc:docChg chg="undo custSel addSld delSld modSld">
-      <pc:chgData name="Long B Nguyen" userId="f59fb8f3-a021-417a-8bc1-65c8d471c621" providerId="ADAL" clId="{B1BC82AE-0B84-6345-94DD-50FF764891EB}" dt="2021-06-14T17:20:27.112" v="1165" actId="20577"/>
-      <pc:docMkLst>
-        <pc:docMk/>
-      </pc:docMkLst>
-      <pc:sldChg chg="del">
-        <pc:chgData name="Long B Nguyen" userId="f59fb8f3-a021-417a-8bc1-65c8d471c621" providerId="ADAL" clId="{B1BC82AE-0B84-6345-94DD-50FF764891EB}" dt="2021-06-11T17:38:43.853" v="12" actId="2696"/>
-        <pc:sldMkLst>
-          <pc:docMk/>
-          <pc:sldMk cId="833801237" sldId="313"/>
-        </pc:sldMkLst>
-      </pc:sldChg>
-      <pc:sldChg chg="del">
-        <pc:chgData name="Long B Nguyen" userId="f59fb8f3-a021-417a-8bc1-65c8d471c621" providerId="ADAL" clId="{B1BC82AE-0B84-6345-94DD-50FF764891EB}" dt="2021-06-11T17:38:43.853" v="12" actId="2696"/>
-        <pc:sldMkLst>
-          <pc:docMk/>
-          <pc:sldMk cId="4199940570" sldId="314"/>
-        </pc:sldMkLst>
-      </pc:sldChg>
-      <pc:sldChg chg="del">
-        <pc:chgData name="Long B Nguyen" userId="f59fb8f3-a021-417a-8bc1-65c8d471c621" providerId="ADAL" clId="{B1BC82AE-0B84-6345-94DD-50FF764891EB}" dt="2021-06-11T17:38:43.853" v="12" actId="2696"/>
-        <pc:sldMkLst>
-          <pc:docMk/>
-          <pc:sldMk cId="1902012464" sldId="315"/>
-        </pc:sldMkLst>
-      </pc:sldChg>
-      <pc:sldChg chg="del">
-        <pc:chgData name="Long B Nguyen" userId="f59fb8f3-a021-417a-8bc1-65c8d471c621" providerId="ADAL" clId="{B1BC82AE-0B84-6345-94DD-50FF764891EB}" dt="2021-06-11T17:38:43.853" v="12" actId="2696"/>
-        <pc:sldMkLst>
-          <pc:docMk/>
-          <pc:sldMk cId="1824894821" sldId="316"/>
-        </pc:sldMkLst>
-      </pc:sldChg>
-      <pc:sldChg chg="del">
-        <pc:chgData name="Long B Nguyen" userId="f59fb8f3-a021-417a-8bc1-65c8d471c621" providerId="ADAL" clId="{B1BC82AE-0B84-6345-94DD-50FF764891EB}" dt="2021-06-11T17:38:43.853" v="12" actId="2696"/>
-        <pc:sldMkLst>
-          <pc:docMk/>
-          <pc:sldMk cId="1105327036" sldId="317"/>
-        </pc:sldMkLst>
-      </pc:sldChg>
-      <pc:sldChg chg="del">
-        <pc:chgData name="Long B Nguyen" userId="f59fb8f3-a021-417a-8bc1-65c8d471c621" providerId="ADAL" clId="{B1BC82AE-0B84-6345-94DD-50FF764891EB}" dt="2021-06-11T17:38:43.853" v="12" actId="2696"/>
-        <pc:sldMkLst>
-          <pc:docMk/>
-          <pc:sldMk cId="1694859685" sldId="319"/>
-        </pc:sldMkLst>
-      </pc:sldChg>
-      <pc:sldChg chg="del">
-        <pc:chgData name="Long B Nguyen" userId="f59fb8f3-a021-417a-8bc1-65c8d471c621" providerId="ADAL" clId="{B1BC82AE-0B84-6345-94DD-50FF764891EB}" dt="2021-06-11T17:38:43.853" v="12" actId="2696"/>
-        <pc:sldMkLst>
-          <pc:docMk/>
-          <pc:sldMk cId="3981954340" sldId="320"/>
-        </pc:sldMkLst>
-      </pc:sldChg>
-      <pc:sldChg chg="del">
-        <pc:chgData name="Long B Nguyen" userId="f59fb8f3-a021-417a-8bc1-65c8d471c621" providerId="ADAL" clId="{B1BC82AE-0B84-6345-94DD-50FF764891EB}" dt="2021-06-11T17:38:43.853" v="12" actId="2696"/>
-        <pc:sldMkLst>
-          <pc:docMk/>
-          <pc:sldMk cId="3869412028" sldId="321"/>
-        </pc:sldMkLst>
-      </pc:sldChg>
-      <pc:sldChg chg="del">
-        <pc:chgData name="Long B Nguyen" userId="f59fb8f3-a021-417a-8bc1-65c8d471c621" providerId="ADAL" clId="{B1BC82AE-0B84-6345-94DD-50FF764891EB}" dt="2021-06-11T17:38:43.853" v="12" actId="2696"/>
-        <pc:sldMkLst>
-          <pc:docMk/>
-          <pc:sldMk cId="545779161" sldId="322"/>
-        </pc:sldMkLst>
-      </pc:sldChg>
-      <pc:sldChg chg="del">
-        <pc:chgData name="Long B Nguyen" userId="f59fb8f3-a021-417a-8bc1-65c8d471c621" providerId="ADAL" clId="{B1BC82AE-0B84-6345-94DD-50FF764891EB}" dt="2021-06-11T17:38:43.853" v="12" actId="2696"/>
-        <pc:sldMkLst>
-          <pc:docMk/>
-          <pc:sldMk cId="3176068915" sldId="323"/>
-        </pc:sldMkLst>
-      </pc:sldChg>
-      <pc:sldChg chg="del">
-        <pc:chgData name="Long B Nguyen" userId="f59fb8f3-a021-417a-8bc1-65c8d471c621" providerId="ADAL" clId="{B1BC82AE-0B84-6345-94DD-50FF764891EB}" dt="2021-06-11T17:38:43.853" v="12" actId="2696"/>
-        <pc:sldMkLst>
-          <pc:docMk/>
-          <pc:sldMk cId="2087798247" sldId="328"/>
-        </pc:sldMkLst>
-      </pc:sldChg>
-      <pc:sldChg chg="del">
-        <pc:chgData name="Long B Nguyen" userId="f59fb8f3-a021-417a-8bc1-65c8d471c621" providerId="ADAL" clId="{B1BC82AE-0B84-6345-94DD-50FF764891EB}" dt="2021-06-11T17:38:43.853" v="12" actId="2696"/>
-        <pc:sldMkLst>
-          <pc:docMk/>
-          <pc:sldMk cId="1447299358" sldId="329"/>
-        </pc:sldMkLst>
-      </pc:sldChg>
-      <pc:sldChg chg="del">
-        <pc:chgData name="Long B Nguyen" userId="f59fb8f3-a021-417a-8bc1-65c8d471c621" providerId="ADAL" clId="{B1BC82AE-0B84-6345-94DD-50FF764891EB}" dt="2021-06-11T17:38:43.853" v="12" actId="2696"/>
-        <pc:sldMkLst>
-          <pc:docMk/>
-          <pc:sldMk cId="1830555247" sldId="342"/>
-        </pc:sldMkLst>
-      </pc:sldChg>
-      <pc:sldChg chg="del">
-        <pc:chgData name="Long B Nguyen" userId="f59fb8f3-a021-417a-8bc1-65c8d471c621" providerId="ADAL" clId="{B1BC82AE-0B84-6345-94DD-50FF764891EB}" dt="2021-06-11T17:38:43.853" v="12" actId="2696"/>
-        <pc:sldMkLst>
-          <pc:docMk/>
-          <pc:sldMk cId="2861772922" sldId="343"/>
-        </pc:sldMkLst>
-      </pc:sldChg>
-      <pc:sldChg chg="del">
-        <pc:chgData name="Long B Nguyen" userId="f59fb8f3-a021-417a-8bc1-65c8d471c621" providerId="ADAL" clId="{B1BC82AE-0B84-6345-94DD-50FF764891EB}" dt="2021-06-11T17:40:01.820" v="41" actId="2696"/>
-        <pc:sldMkLst>
-          <pc:docMk/>
-          <pc:sldMk cId="1270247652" sldId="344"/>
-        </pc:sldMkLst>
-      </pc:sldChg>
-      <pc:sldChg chg="del">
-        <pc:chgData name="Long B Nguyen" userId="f59fb8f3-a021-417a-8bc1-65c8d471c621" providerId="ADAL" clId="{B1BC82AE-0B84-6345-94DD-50FF764891EB}" dt="2021-06-11T17:38:43.853" v="12" actId="2696"/>
-        <pc:sldMkLst>
-          <pc:docMk/>
-          <pc:sldMk cId="2130219534" sldId="345"/>
-        </pc:sldMkLst>
-      </pc:sldChg>
-      <pc:sldChg chg="del">
-        <pc:chgData name="Long B Nguyen" userId="f59fb8f3-a021-417a-8bc1-65c8d471c621" providerId="ADAL" clId="{B1BC82AE-0B84-6345-94DD-50FF764891EB}" dt="2021-06-11T17:38:43.853" v="12" actId="2696"/>
-        <pc:sldMkLst>
-          <pc:docMk/>
-          <pc:sldMk cId="2921473555" sldId="348"/>
-        </pc:sldMkLst>
-      </pc:sldChg>
-      <pc:sldChg chg="modSp mod">
-        <pc:chgData name="Long B Nguyen" userId="f59fb8f3-a021-417a-8bc1-65c8d471c621" providerId="ADAL" clId="{B1BC82AE-0B84-6345-94DD-50FF764891EB}" dt="2021-06-14T17:20:27.112" v="1165" actId="20577"/>
-        <pc:sldMkLst>
-          <pc:docMk/>
-          <pc:sldMk cId="1685712336" sldId="349"/>
-        </pc:sldMkLst>
-      </pc:sldChg>
-      <pc:sldChg chg="del">
-        <pc:chgData name="Long B Nguyen" userId="f59fb8f3-a021-417a-8bc1-65c8d471c621" providerId="ADAL" clId="{B1BC82AE-0B84-6345-94DD-50FF764891EB}" dt="2021-06-11T17:39:59.740" v="40" actId="2696"/>
-        <pc:sldMkLst>
-          <pc:docMk/>
-          <pc:sldMk cId="1173183267" sldId="350"/>
-        </pc:sldMkLst>
-      </pc:sldChg>
-      <pc:sldChg chg="del">
-        <pc:chgData name="Long B Nguyen" userId="f59fb8f3-a021-417a-8bc1-65c8d471c621" providerId="ADAL" clId="{B1BC82AE-0B84-6345-94DD-50FF764891EB}" dt="2021-06-11T17:38:43.853" v="12" actId="2696"/>
-        <pc:sldMkLst>
-          <pc:docMk/>
-          <pc:sldMk cId="1166836157" sldId="351"/>
-        </pc:sldMkLst>
-      </pc:sldChg>
-      <pc:sldChg chg="addSp modSp add mod modAnim">
-        <pc:chgData name="Long B Nguyen" userId="f59fb8f3-a021-417a-8bc1-65c8d471c621" providerId="ADAL" clId="{B1BC82AE-0B84-6345-94DD-50FF764891EB}" dt="2021-06-14T12:29:16.347" v="1023" actId="20577"/>
-        <pc:sldMkLst>
-          <pc:docMk/>
-          <pc:sldMk cId="136760411" sldId="584"/>
-        </pc:sldMkLst>
-      </pc:sldChg>
-      <pc:sldChg chg="modSp add del mod">
-        <pc:chgData name="Long B Nguyen" userId="f59fb8f3-a021-417a-8bc1-65c8d471c621" providerId="ADAL" clId="{B1BC82AE-0B84-6345-94DD-50FF764891EB}" dt="2021-06-11T17:43:49.292" v="113" actId="2696"/>
-        <pc:sldMkLst>
-          <pc:docMk/>
-          <pc:sldMk cId="3648112237" sldId="585"/>
-        </pc:sldMkLst>
-      </pc:sldChg>
-      <pc:sldChg chg="modSp add mod">
-        <pc:chgData name="Long B Nguyen" userId="f59fb8f3-a021-417a-8bc1-65c8d471c621" providerId="ADAL" clId="{B1BC82AE-0B84-6345-94DD-50FF764891EB}" dt="2021-06-11T18:02:30.563" v="523" actId="1076"/>
-        <pc:sldMkLst>
-          <pc:docMk/>
-          <pc:sldMk cId="125234064" sldId="586"/>
-        </pc:sldMkLst>
-      </pc:sldChg>
-      <pc:sldChg chg="modSp add mod modAnim">
-        <pc:chgData name="Long B Nguyen" userId="f59fb8f3-a021-417a-8bc1-65c8d471c621" providerId="ADAL" clId="{B1BC82AE-0B84-6345-94DD-50FF764891EB}" dt="2021-06-14T12:40:36.087" v="1147" actId="14100"/>
-        <pc:sldMkLst>
-          <pc:docMk/>
-          <pc:sldMk cId="3486834731" sldId="587"/>
-        </pc:sldMkLst>
-      </pc:sldChg>
-      <pc:sldChg chg="modSp add mod modAnim">
-        <pc:chgData name="Long B Nguyen" userId="f59fb8f3-a021-417a-8bc1-65c8d471c621" providerId="ADAL" clId="{B1BC82AE-0B84-6345-94DD-50FF764891EB}" dt="2021-06-14T12:32:35.492" v="1039" actId="255"/>
-        <pc:sldMkLst>
-          <pc:docMk/>
-          <pc:sldMk cId="415119594" sldId="589"/>
-        </pc:sldMkLst>
-      </pc:sldChg>
-      <pc:sldChg chg="modSp add mod">
-        <pc:chgData name="Long B Nguyen" userId="f59fb8f3-a021-417a-8bc1-65c8d471c621" providerId="ADAL" clId="{B1BC82AE-0B84-6345-94DD-50FF764891EB}" dt="2021-06-14T12:33:38.554" v="1059" actId="20577"/>
-        <pc:sldMkLst>
-          <pc:docMk/>
-          <pc:sldMk cId="3691232827" sldId="590"/>
-        </pc:sldMkLst>
-      </pc:sldChg>
-      <pc:sldChg chg="modSp add mod">
-        <pc:chgData name="Long B Nguyen" userId="f59fb8f3-a021-417a-8bc1-65c8d471c621" providerId="ADAL" clId="{B1BC82AE-0B84-6345-94DD-50FF764891EB}" dt="2021-06-14T12:33:20.785" v="1049" actId="20577"/>
-        <pc:sldMkLst>
-          <pc:docMk/>
-          <pc:sldMk cId="120224996" sldId="591"/>
-        </pc:sldMkLst>
-      </pc:sldChg>
-      <pc:sldChg chg="add">
-        <pc:chgData name="Long B Nguyen" userId="f59fb8f3-a021-417a-8bc1-65c8d471c621" providerId="ADAL" clId="{B1BC82AE-0B84-6345-94DD-50FF764891EB}" dt="2021-06-11T17:39:51.629" v="39"/>
-        <pc:sldMkLst>
-          <pc:docMk/>
-          <pc:sldMk cId="3567235671" sldId="592"/>
-        </pc:sldMkLst>
-      </pc:sldChg>
-      <pc:sldChg chg="add">
-        <pc:chgData name="Long B Nguyen" userId="f59fb8f3-a021-417a-8bc1-65c8d471c621" providerId="ADAL" clId="{B1BC82AE-0B84-6345-94DD-50FF764891EB}" dt="2021-06-11T17:39:51.629" v="39"/>
+        <pc:chgData name="Long B Nguyen" userId="f59fb8f3-a021-417a-8bc1-65c8d471c621" providerId="ADAL" clId="{93BE87BA-F8CA-5C1F-82FF-B4CAB5F485A1}" dt="2026-02-25T18:54:57.354" v="38" actId="1076"/>
         <pc:sldMkLst>
           <pc:docMk/>
           <pc:sldMk cId="2963124289" sldId="593"/>
         </pc:sldMkLst>
-      </pc:sldChg>
-      <pc:sldChg chg="add del">
-        <pc:chgData name="Long B Nguyen" userId="f59fb8f3-a021-417a-8bc1-65c8d471c621" providerId="ADAL" clId="{B1BC82AE-0B84-6345-94DD-50FF764891EB}" dt="2021-06-11T17:40:26.900" v="42" actId="2696"/>
-        <pc:sldMkLst>
-          <pc:docMk/>
-          <pc:sldMk cId="1969841755" sldId="594"/>
-        </pc:sldMkLst>
-      </pc:sldChg>
-      <pc:sldChg chg="add del">
-        <pc:chgData name="Long B Nguyen" userId="f59fb8f3-a021-417a-8bc1-65c8d471c621" providerId="ADAL" clId="{B1BC82AE-0B84-6345-94DD-50FF764891EB}" dt="2021-06-11T17:40:26.900" v="42" actId="2696"/>
-        <pc:sldMkLst>
-          <pc:docMk/>
-          <pc:sldMk cId="2632639895" sldId="595"/>
-        </pc:sldMkLst>
-      </pc:sldChg>
-      <pc:sldChg chg="add">
-        <pc:chgData name="Long B Nguyen" userId="f59fb8f3-a021-417a-8bc1-65c8d471c621" providerId="ADAL" clId="{B1BC82AE-0B84-6345-94DD-50FF764891EB}" dt="2021-06-11T17:39:51.629" v="39"/>
-        <pc:sldMkLst>
-          <pc:docMk/>
-          <pc:sldMk cId="4166247176" sldId="596"/>
-        </pc:sldMkLst>
-      </pc:sldChg>
-      <pc:sldChg chg="del">
-        <pc:chgData name="Long B Nguyen" userId="f59fb8f3-a021-417a-8bc1-65c8d471c621" providerId="ADAL" clId="{B1BC82AE-0B84-6345-94DD-50FF764891EB}" dt="2021-06-11T17:38:47.453" v="13" actId="2696"/>
-        <pc:sldMkLst>
-          <pc:docMk/>
-          <pc:sldMk cId="630408664" sldId="598"/>
-        </pc:sldMkLst>
-      </pc:sldChg>
-      <pc:sldChg chg="add">
-        <pc:chgData name="Long B Nguyen" userId="f59fb8f3-a021-417a-8bc1-65c8d471c621" providerId="ADAL" clId="{B1BC82AE-0B84-6345-94DD-50FF764891EB}" dt="2021-06-11T17:39:51.629" v="39"/>
-        <pc:sldMkLst>
-          <pc:docMk/>
-          <pc:sldMk cId="3623100011" sldId="598"/>
-        </pc:sldMkLst>
-      </pc:sldChg>
-      <pc:sldChg chg="add">
-        <pc:chgData name="Long B Nguyen" userId="f59fb8f3-a021-417a-8bc1-65c8d471c621" providerId="ADAL" clId="{B1BC82AE-0B84-6345-94DD-50FF764891EB}" dt="2021-06-11T17:39:51.629" v="39"/>
-        <pc:sldMkLst>
-          <pc:docMk/>
-          <pc:sldMk cId="552104633" sldId="599"/>
-        </pc:sldMkLst>
-      </pc:sldChg>
-      <pc:sldChg chg="add">
-        <pc:chgData name="Long B Nguyen" userId="f59fb8f3-a021-417a-8bc1-65c8d471c621" providerId="ADAL" clId="{B1BC82AE-0B84-6345-94DD-50FF764891EB}" dt="2021-06-11T17:39:51.629" v="39"/>
-        <pc:sldMkLst>
-          <pc:docMk/>
-          <pc:sldMk cId="293212044" sldId="600"/>
-        </pc:sldMkLst>
-      </pc:sldChg>
-      <pc:sldChg chg="add">
-        <pc:chgData name="Long B Nguyen" userId="f59fb8f3-a021-417a-8bc1-65c8d471c621" providerId="ADAL" clId="{B1BC82AE-0B84-6345-94DD-50FF764891EB}" dt="2021-06-11T17:39:51.629" v="39"/>
-        <pc:sldMkLst>
-          <pc:docMk/>
-          <pc:sldMk cId="563346564" sldId="601"/>
-        </pc:sldMkLst>
-      </pc:sldChg>
-      <pc:sldChg chg="add">
-        <pc:chgData name="Long B Nguyen" userId="f59fb8f3-a021-417a-8bc1-65c8d471c621" providerId="ADAL" clId="{B1BC82AE-0B84-6345-94DD-50FF764891EB}" dt="2021-06-11T17:39:51.629" v="39"/>
-        <pc:sldMkLst>
-          <pc:docMk/>
-          <pc:sldMk cId="2528953800" sldId="602"/>
-        </pc:sldMkLst>
-      </pc:sldChg>
-      <pc:sldChg chg="add">
-        <pc:chgData name="Long B Nguyen" userId="f59fb8f3-a021-417a-8bc1-65c8d471c621" providerId="ADAL" clId="{B1BC82AE-0B84-6345-94DD-50FF764891EB}" dt="2021-06-11T17:39:51.629" v="39"/>
-        <pc:sldMkLst>
-          <pc:docMk/>
-          <pc:sldMk cId="1313664081" sldId="603"/>
-        </pc:sldMkLst>
-      </pc:sldChg>
-      <pc:sldChg chg="add">
-        <pc:chgData name="Long B Nguyen" userId="f59fb8f3-a021-417a-8bc1-65c8d471c621" providerId="ADAL" clId="{B1BC82AE-0B84-6345-94DD-50FF764891EB}" dt="2021-06-11T17:39:51.629" v="39"/>
-        <pc:sldMkLst>
-          <pc:docMk/>
-          <pc:sldMk cId="4223295037" sldId="604"/>
-        </pc:sldMkLst>
-      </pc:sldChg>
-      <pc:sldChg chg="add del">
-        <pc:chgData name="Long B Nguyen" userId="f59fb8f3-a021-417a-8bc1-65c8d471c621" providerId="ADAL" clId="{B1BC82AE-0B84-6345-94DD-50FF764891EB}" dt="2021-06-11T17:41:28.363" v="61" actId="2696"/>
-        <pc:sldMkLst>
-          <pc:docMk/>
-          <pc:sldMk cId="3830207338" sldId="605"/>
-        </pc:sldMkLst>
-      </pc:sldChg>
-      <pc:sldChg chg="add">
-        <pc:chgData name="Long B Nguyen" userId="f59fb8f3-a021-417a-8bc1-65c8d471c621" providerId="ADAL" clId="{B1BC82AE-0B84-6345-94DD-50FF764891EB}" dt="2021-06-11T17:39:51.629" v="39"/>
-        <pc:sldMkLst>
-          <pc:docMk/>
-          <pc:sldMk cId="1230781990" sldId="606"/>
-        </pc:sldMkLst>
-      </pc:sldChg>
-      <pc:sldChg chg="add">
-        <pc:chgData name="Long B Nguyen" userId="f59fb8f3-a021-417a-8bc1-65c8d471c621" providerId="ADAL" clId="{B1BC82AE-0B84-6345-94DD-50FF764891EB}" dt="2021-06-11T17:39:51.629" v="39"/>
-        <pc:sldMkLst>
-          <pc:docMk/>
-          <pc:sldMk cId="3489750888" sldId="607"/>
-        </pc:sldMkLst>
-      </pc:sldChg>
-      <pc:sldChg chg="add">
-        <pc:chgData name="Long B Nguyen" userId="f59fb8f3-a021-417a-8bc1-65c8d471c621" providerId="ADAL" clId="{B1BC82AE-0B84-6345-94DD-50FF764891EB}" dt="2021-06-11T17:39:51.629" v="39"/>
-        <pc:sldMkLst>
-          <pc:docMk/>
-          <pc:sldMk cId="2098854286" sldId="609"/>
-        </pc:sldMkLst>
-      </pc:sldChg>
-      <pc:sldChg chg="add">
-        <pc:chgData name="Long B Nguyen" userId="f59fb8f3-a021-417a-8bc1-65c8d471c621" providerId="ADAL" clId="{B1BC82AE-0B84-6345-94DD-50FF764891EB}" dt="2021-06-11T17:39:51.629" v="39"/>
-        <pc:sldMkLst>
-          <pc:docMk/>
-          <pc:sldMk cId="2983803253" sldId="610"/>
-        </pc:sldMkLst>
-      </pc:sldChg>
-      <pc:sldChg chg="add">
-        <pc:chgData name="Long B Nguyen" userId="f59fb8f3-a021-417a-8bc1-65c8d471c621" providerId="ADAL" clId="{B1BC82AE-0B84-6345-94DD-50FF764891EB}" dt="2021-06-11T17:39:51.629" v="39"/>
-        <pc:sldMkLst>
-          <pc:docMk/>
-          <pc:sldMk cId="1300860084" sldId="611"/>
-        </pc:sldMkLst>
-      </pc:sldChg>
-      <pc:sldChg chg="add">
-        <pc:chgData name="Long B Nguyen" userId="f59fb8f3-a021-417a-8bc1-65c8d471c621" providerId="ADAL" clId="{B1BC82AE-0B84-6345-94DD-50FF764891EB}" dt="2021-06-11T17:39:51.629" v="39"/>
-        <pc:sldMkLst>
-          <pc:docMk/>
-          <pc:sldMk cId="2367747530" sldId="613"/>
-        </pc:sldMkLst>
-      </pc:sldChg>
-      <pc:sldChg chg="add">
-        <pc:chgData name="Long B Nguyen" userId="f59fb8f3-a021-417a-8bc1-65c8d471c621" providerId="ADAL" clId="{B1BC82AE-0B84-6345-94DD-50FF764891EB}" dt="2021-06-11T17:39:51.629" v="39"/>
-        <pc:sldMkLst>
-          <pc:docMk/>
-          <pc:sldMk cId="1482758976" sldId="614"/>
-        </pc:sldMkLst>
-      </pc:sldChg>
-      <pc:sldChg chg="add del">
-        <pc:chgData name="Long B Nguyen" userId="f59fb8f3-a021-417a-8bc1-65c8d471c621" providerId="ADAL" clId="{B1BC82AE-0B84-6345-94DD-50FF764891EB}" dt="2021-06-11T18:07:33.627" v="839" actId="2696"/>
-        <pc:sldMkLst>
-          <pc:docMk/>
-          <pc:sldMk cId="218478499" sldId="615"/>
-        </pc:sldMkLst>
-      </pc:sldChg>
-      <pc:sldChg chg="modSp add del modAnim">
-        <pc:chgData name="Long B Nguyen" userId="f59fb8f3-a021-417a-8bc1-65c8d471c621" providerId="ADAL" clId="{B1BC82AE-0B84-6345-94DD-50FF764891EB}" dt="2021-06-11T18:08:12.827" v="876" actId="2696"/>
-        <pc:sldMkLst>
-          <pc:docMk/>
-          <pc:sldMk cId="873559899" sldId="615"/>
-        </pc:sldMkLst>
-      </pc:sldChg>
-      <pc:sldChg chg="modSp add del mod modAnim">
-        <pc:chgData name="Long B Nguyen" userId="f59fb8f3-a021-417a-8bc1-65c8d471c621" providerId="ADAL" clId="{B1BC82AE-0B84-6345-94DD-50FF764891EB}" dt="2021-06-11T18:09:48.158" v="909" actId="2696"/>
-        <pc:sldMkLst>
-          <pc:docMk/>
-          <pc:sldMk cId="1639420940" sldId="615"/>
-        </pc:sldMkLst>
-      </pc:sldChg>
-      <pc:sldChg chg="add del">
-        <pc:chgData name="Long B Nguyen" userId="f59fb8f3-a021-417a-8bc1-65c8d471c621" providerId="ADAL" clId="{B1BC82AE-0B84-6345-94DD-50FF764891EB}" dt="2021-06-11T18:08:28.968" v="878" actId="2696"/>
-        <pc:sldMkLst>
-          <pc:docMk/>
-          <pc:sldMk cId="2254731236" sldId="615"/>
-        </pc:sldMkLst>
-      </pc:sldChg>
-      <pc:sldChg chg="add del">
-        <pc:chgData name="Long B Nguyen" userId="f59fb8f3-a021-417a-8bc1-65c8d471c621" providerId="ADAL" clId="{B1BC82AE-0B84-6345-94DD-50FF764891EB}" dt="2021-06-11T18:00:47.983" v="513" actId="2696"/>
-        <pc:sldMkLst>
-          <pc:docMk/>
-          <pc:sldMk cId="1786708860" sldId="616"/>
-        </pc:sldMkLst>
-      </pc:sldChg>
-      <pc:sldChg chg="add">
-        <pc:chgData name="Long B Nguyen" userId="f59fb8f3-a021-417a-8bc1-65c8d471c621" providerId="ADAL" clId="{B1BC82AE-0B84-6345-94DD-50FF764891EB}" dt="2021-06-11T17:39:51.629" v="39"/>
-        <pc:sldMkLst>
-          <pc:docMk/>
-          <pc:sldMk cId="3448653526" sldId="617"/>
-        </pc:sldMkLst>
-      </pc:sldChg>
-      <pc:sldChg chg="add">
-        <pc:chgData name="Long B Nguyen" userId="f59fb8f3-a021-417a-8bc1-65c8d471c621" providerId="ADAL" clId="{B1BC82AE-0B84-6345-94DD-50FF764891EB}" dt="2021-06-11T17:39:51.629" v="39"/>
-        <pc:sldMkLst>
-          <pc:docMk/>
-          <pc:sldMk cId="4193751558" sldId="618"/>
-        </pc:sldMkLst>
-      </pc:sldChg>
-      <pc:sldChg chg="del">
-        <pc:chgData name="Long B Nguyen" userId="f59fb8f3-a021-417a-8bc1-65c8d471c621" providerId="ADAL" clId="{B1BC82AE-0B84-6345-94DD-50FF764891EB}" dt="2021-06-11T17:38:43.853" v="12" actId="2696"/>
-        <pc:sldMkLst>
-          <pc:docMk/>
-          <pc:sldMk cId="890660370" sldId="626"/>
-        </pc:sldMkLst>
-      </pc:sldChg>
-      <pc:sldChg chg="del">
-        <pc:chgData name="Long B Nguyen" userId="f59fb8f3-a021-417a-8bc1-65c8d471c621" providerId="ADAL" clId="{B1BC82AE-0B84-6345-94DD-50FF764891EB}" dt="2021-06-11T17:38:43.853" v="12" actId="2696"/>
-        <pc:sldMkLst>
-          <pc:docMk/>
-          <pc:sldMk cId="3969006746" sldId="627"/>
-        </pc:sldMkLst>
-      </pc:sldChg>
-      <pc:sldChg chg="del">
-        <pc:chgData name="Long B Nguyen" userId="f59fb8f3-a021-417a-8bc1-65c8d471c621" providerId="ADAL" clId="{B1BC82AE-0B84-6345-94DD-50FF764891EB}" dt="2021-06-11T17:39:59.740" v="40" actId="2696"/>
-        <pc:sldMkLst>
-          <pc:docMk/>
-          <pc:sldMk cId="781734240" sldId="628"/>
-        </pc:sldMkLst>
-      </pc:sldChg>
-      <pc:sldChg chg="del">
-        <pc:chgData name="Long B Nguyen" userId="f59fb8f3-a021-417a-8bc1-65c8d471c621" providerId="ADAL" clId="{B1BC82AE-0B84-6345-94DD-50FF764891EB}" dt="2021-06-11T17:39:59.740" v="40" actId="2696"/>
-        <pc:sldMkLst>
-          <pc:docMk/>
-          <pc:sldMk cId="4189100123" sldId="629"/>
-        </pc:sldMkLst>
-      </pc:sldChg>
-      <pc:sldChg chg="addSp delSp modSp add mod">
-        <pc:chgData name="Long B Nguyen" userId="f59fb8f3-a021-417a-8bc1-65c8d471c621" providerId="ADAL" clId="{B1BC82AE-0B84-6345-94DD-50FF764891EB}" dt="2021-06-11T18:02:03.507" v="519" actId="20577"/>
-        <pc:sldMkLst>
-          <pc:docMk/>
-          <pc:sldMk cId="3673832115" sldId="630"/>
-        </pc:sldMkLst>
-      </pc:sldChg>
-      <pc:sldChg chg="add">
-        <pc:chgData name="Long B Nguyen" userId="f59fb8f3-a021-417a-8bc1-65c8d471c621" providerId="ADAL" clId="{B1BC82AE-0B84-6345-94DD-50FF764891EB}" dt="2021-06-11T17:39:51.629" v="39"/>
-        <pc:sldMkLst>
-          <pc:docMk/>
-          <pc:sldMk cId="2310690584" sldId="631"/>
-        </pc:sldMkLst>
-      </pc:sldChg>
-      <pc:sldChg chg="delSp modSp add mod modAnim">
-        <pc:chgData name="Long B Nguyen" userId="f59fb8f3-a021-417a-8bc1-65c8d471c621" providerId="ADAL" clId="{B1BC82AE-0B84-6345-94DD-50FF764891EB}" dt="2021-06-14T12:47:14.326" v="1149"/>
-        <pc:sldMkLst>
-          <pc:docMk/>
-          <pc:sldMk cId="298785684" sldId="632"/>
-        </pc:sldMkLst>
-      </pc:sldChg>
-      <pc:sldChg chg="modSp add mod modAnim">
-        <pc:chgData name="Long B Nguyen" userId="f59fb8f3-a021-417a-8bc1-65c8d471c621" providerId="ADAL" clId="{B1BC82AE-0B84-6345-94DD-50FF764891EB}" dt="2021-06-14T12:39:19.721" v="1081"/>
-        <pc:sldMkLst>
-          <pc:docMk/>
-          <pc:sldMk cId="871459493" sldId="633"/>
-        </pc:sldMkLst>
-      </pc:sldChg>
-      <pc:sldChg chg="addSp delSp add del setBg delDesignElem">
-        <pc:chgData name="Long B Nguyen" userId="f59fb8f3-a021-417a-8bc1-65c8d471c621" providerId="ADAL" clId="{B1BC82AE-0B84-6345-94DD-50FF764891EB}" dt="2021-06-14T17:20:21.222" v="1152"/>
-        <pc:sldMkLst>
-          <pc:docMk/>
-          <pc:sldMk cId="106142046" sldId="634"/>
-        </pc:sldMkLst>
-      </pc:sldChg>
-      <pc:sldChg chg="del">
-        <pc:chgData name="Long B Nguyen" userId="f59fb8f3-a021-417a-8bc1-65c8d471c621" providerId="ADAL" clId="{B1BC82AE-0B84-6345-94DD-50FF764891EB}" dt="2021-06-11T17:38:43.853" v="12" actId="2696"/>
-        <pc:sldMkLst>
-          <pc:docMk/>
-          <pc:sldMk cId="3668115397" sldId="643"/>
-        </pc:sldMkLst>
-      </pc:sldChg>
-      <pc:sldChg chg="del">
-        <pc:chgData name="Long B Nguyen" userId="f59fb8f3-a021-417a-8bc1-65c8d471c621" providerId="ADAL" clId="{B1BC82AE-0B84-6345-94DD-50FF764891EB}" dt="2021-06-11T17:38:43.853" v="12" actId="2696"/>
-        <pc:sldMkLst>
-          <pc:docMk/>
-          <pc:sldMk cId="3323891907" sldId="647"/>
-        </pc:sldMkLst>
-      </pc:sldChg>
-      <pc:sldChg chg="del">
-        <pc:chgData name="Long B Nguyen" userId="f59fb8f3-a021-417a-8bc1-65c8d471c621" providerId="ADAL" clId="{B1BC82AE-0B84-6345-94DD-50FF764891EB}" dt="2021-06-11T17:38:43.853" v="12" actId="2696"/>
-        <pc:sldMkLst>
-          <pc:docMk/>
-          <pc:sldMk cId="2605170431" sldId="648"/>
-        </pc:sldMkLst>
-      </pc:sldChg>
-      <pc:sldChg chg="del">
-        <pc:chgData name="Long B Nguyen" userId="f59fb8f3-a021-417a-8bc1-65c8d471c621" providerId="ADAL" clId="{B1BC82AE-0B84-6345-94DD-50FF764891EB}" dt="2021-06-11T17:38:48.799" v="14" actId="2696"/>
-        <pc:sldMkLst>
-          <pc:docMk/>
-          <pc:sldMk cId="1498021361" sldId="649"/>
-        </pc:sldMkLst>
-      </pc:sldChg>
-    </pc:docChg>
-  </pc:docChgLst>
-  <pc:docChgLst>
-    <pc:chgData name="Long Nguyen" userId="f59fb8f3-a021-417a-8bc1-65c8d471c621" providerId="ADAL" clId="{E750E5C6-FF21-6A4B-87D9-06DAFBDEEAE8}"/>
-    <pc:docChg chg="modSld">
-      <pc:chgData name="Long Nguyen" userId="f59fb8f3-a021-417a-8bc1-65c8d471c621" providerId="ADAL" clId="{E750E5C6-FF21-6A4B-87D9-06DAFBDEEAE8}" dt="2023-02-28T16:53:06.770" v="95" actId="20577"/>
-      <pc:docMkLst>
-        <pc:docMk/>
-      </pc:docMkLst>
-      <pc:sldChg chg="modSp">
-        <pc:chgData name="Long Nguyen" userId="f59fb8f3-a021-417a-8bc1-65c8d471c621" providerId="ADAL" clId="{E750E5C6-FF21-6A4B-87D9-06DAFBDEEAE8}" dt="2023-02-14T15:07:23.435" v="31" actId="1076"/>
-        <pc:sldMkLst>
-          <pc:docMk/>
-          <pc:sldMk cId="2963124289" sldId="593"/>
-        </pc:sldMkLst>
-      </pc:sldChg>
-      <pc:sldChg chg="modSp modAnim">
-        <pc:chgData name="Long Nguyen" userId="f59fb8f3-a021-417a-8bc1-65c8d471c621" providerId="ADAL" clId="{E750E5C6-FF21-6A4B-87D9-06DAFBDEEAE8}" dt="2023-02-28T16:53:06.770" v="95" actId="20577"/>
-        <pc:sldMkLst>
-          <pc:docMk/>
-          <pc:sldMk cId="1230781990" sldId="606"/>
-        </pc:sldMkLst>
-      </pc:sldChg>
-      <pc:sldChg chg="modSp">
-        <pc:chgData name="Long Nguyen" userId="f59fb8f3-a021-417a-8bc1-65c8d471c621" providerId="ADAL" clId="{E750E5C6-FF21-6A4B-87D9-06DAFBDEEAE8}" dt="2023-02-28T16:52:45.044" v="46" actId="20577"/>
-        <pc:sldMkLst>
-          <pc:docMk/>
-          <pc:sldMk cId="3448653526" sldId="617"/>
-        </pc:sldMkLst>
-      </pc:sldChg>
-    </pc:docChg>
-  </pc:docChgLst>
-  <pc:docChgLst>
-    <pc:chgData name="Long Nguyen" userId="f59fb8f3-a021-417a-8bc1-65c8d471c621" providerId="ADAL" clId="{F28BDA9A-BFEA-0A48-93A2-5F1590075D7B}"/>
-    <pc:docChg chg="custSel addSld delSld modSld">
-      <pc:chgData name="Long Nguyen" userId="f59fb8f3-a021-417a-8bc1-65c8d471c621" providerId="ADAL" clId="{F28BDA9A-BFEA-0A48-93A2-5F1590075D7B}" dt="2022-02-16T18:32:46.597" v="391" actId="20577"/>
-      <pc:docMkLst>
-        <pc:docMk/>
-      </pc:docMkLst>
-      <pc:sldChg chg="modSp modAnim">
-        <pc:chgData name="Long Nguyen" userId="f59fb8f3-a021-417a-8bc1-65c8d471c621" providerId="ADAL" clId="{F28BDA9A-BFEA-0A48-93A2-5F1590075D7B}" dt="2022-02-08T20:45:03.078" v="62" actId="20577"/>
-        <pc:sldMkLst>
-          <pc:docMk/>
-          <pc:sldMk cId="136760411" sldId="584"/>
-        </pc:sldMkLst>
-      </pc:sldChg>
-      <pc:sldChg chg="modSp">
-        <pc:chgData name="Long Nguyen" userId="f59fb8f3-a021-417a-8bc1-65c8d471c621" providerId="ADAL" clId="{F28BDA9A-BFEA-0A48-93A2-5F1590075D7B}" dt="2022-02-10T16:46:09.559" v="384" actId="1076"/>
-        <pc:sldMkLst>
-          <pc:docMk/>
-          <pc:sldMk cId="2963124289" sldId="593"/>
-        </pc:sldMkLst>
-      </pc:sldChg>
-      <pc:sldChg chg="modSp modAnim">
-        <pc:chgData name="Long Nguyen" userId="f59fb8f3-a021-417a-8bc1-65c8d471c621" providerId="ADAL" clId="{F28BDA9A-BFEA-0A48-93A2-5F1590075D7B}" dt="2022-02-16T18:32:46.597" v="391" actId="20577"/>
-        <pc:sldMkLst>
-          <pc:docMk/>
-          <pc:sldMk cId="1230781990" sldId="606"/>
-        </pc:sldMkLst>
-      </pc:sldChg>
-      <pc:sldChg chg="addSp modSp mod modAnim">
-        <pc:chgData name="Long Nguyen" userId="f59fb8f3-a021-417a-8bc1-65c8d471c621" providerId="ADAL" clId="{F28BDA9A-BFEA-0A48-93A2-5F1590075D7B}" dt="2022-02-08T21:00:51.747" v="302"/>
-        <pc:sldMkLst>
-          <pc:docMk/>
-          <pc:sldMk cId="3489750888" sldId="607"/>
-        </pc:sldMkLst>
-      </pc:sldChg>
-      <pc:sldChg chg="modSp mod">
-        <pc:chgData name="Long Nguyen" userId="f59fb8f3-a021-417a-8bc1-65c8d471c621" providerId="ADAL" clId="{F28BDA9A-BFEA-0A48-93A2-5F1590075D7B}" dt="2022-02-08T20:44:44.402" v="1" actId="27636"/>
-        <pc:sldMkLst>
-          <pc:docMk/>
-          <pc:sldMk cId="1300860084" sldId="611"/>
-        </pc:sldMkLst>
-      </pc:sldChg>
-      <pc:sldChg chg="modSp mod">
-        <pc:chgData name="Long Nguyen" userId="f59fb8f3-a021-417a-8bc1-65c8d471c621" providerId="ADAL" clId="{F28BDA9A-BFEA-0A48-93A2-5F1590075D7B}" dt="2022-02-09T01:06:09.096" v="344" actId="20577"/>
-        <pc:sldMkLst>
-          <pc:docMk/>
-          <pc:sldMk cId="1482758976" sldId="614"/>
-        </pc:sldMkLst>
-      </pc:sldChg>
-      <pc:sldChg chg="modSp mod">
-        <pc:chgData name="Long Nguyen" userId="f59fb8f3-a021-417a-8bc1-65c8d471c621" providerId="ADAL" clId="{F28BDA9A-BFEA-0A48-93A2-5F1590075D7B}" dt="2022-02-08T21:01:54.641" v="320" actId="207"/>
-        <pc:sldMkLst>
-          <pc:docMk/>
-          <pc:sldMk cId="3448653526" sldId="617"/>
-        </pc:sldMkLst>
-      </pc:sldChg>
-      <pc:sldChg chg="add del">
-        <pc:chgData name="Long Nguyen" userId="f59fb8f3-a021-417a-8bc1-65c8d471c621" providerId="ADAL" clId="{F28BDA9A-BFEA-0A48-93A2-5F1590075D7B}" dt="2022-02-08T21:01:28.851" v="307" actId="2696"/>
-        <pc:sldMkLst>
-          <pc:docMk/>
-          <pc:sldMk cId="3340167068" sldId="618"/>
-        </pc:sldMkLst>
-      </pc:sldChg>
-      <pc:sldChg chg="del">
-        <pc:chgData name="Long Nguyen" userId="f59fb8f3-a021-417a-8bc1-65c8d471c621" providerId="ADAL" clId="{F28BDA9A-BFEA-0A48-93A2-5F1590075D7B}" dt="2022-02-08T20:59:26.149" v="284" actId="2696"/>
-        <pc:sldMkLst>
-          <pc:docMk/>
-          <pc:sldMk cId="4193751558" sldId="618"/>
-        </pc:sldMkLst>
-      </pc:sldChg>
-      <pc:sldChg chg="modSp add del mod modAnim">
-        <pc:chgData name="Long Nguyen" userId="f59fb8f3-a021-417a-8bc1-65c8d471c621" providerId="ADAL" clId="{F28BDA9A-BFEA-0A48-93A2-5F1590075D7B}" dt="2022-02-08T20:56:27.350" v="193" actId="2696"/>
-        <pc:sldMkLst>
-          <pc:docMk/>
-          <pc:sldMk cId="839999011" sldId="634"/>
-        </pc:sldMkLst>
-      </pc:sldChg>
-    </pc:docChg>
-  </pc:docChgLst>
-  <pc:docChgLst>
-    <pc:chgData name="Long B Nguyen" userId="f59fb8f3-a021-417a-8bc1-65c8d471c621" providerId="ADAL" clId="{AA9102B5-DACA-D841-B260-AEEBF90FC60A}"/>
-    <pc:docChg chg="custSel addSld delSld modSld">
-      <pc:chgData name="Long B Nguyen" userId="f59fb8f3-a021-417a-8bc1-65c8d471c621" providerId="ADAL" clId="{AA9102B5-DACA-D841-B260-AEEBF90FC60A}" dt="2020-01-06T17:07:10.515" v="1519" actId="2711"/>
-      <pc:docMkLst>
-        <pc:docMk/>
-      </pc:docMkLst>
-      <pc:sldChg chg="modSp">
-        <pc:chgData name="Long B Nguyen" userId="f59fb8f3-a021-417a-8bc1-65c8d471c621" providerId="ADAL" clId="{AA9102B5-DACA-D841-B260-AEEBF90FC60A}" dt="2020-01-05T22:05:23.536" v="23" actId="20577"/>
-        <pc:sldMkLst>
-          <pc:docMk/>
-          <pc:sldMk cId="4247104139" sldId="256"/>
-        </pc:sldMkLst>
-      </pc:sldChg>
-      <pc:sldChg chg="del">
-        <pc:chgData name="Long B Nguyen" userId="f59fb8f3-a021-417a-8bc1-65c8d471c621" providerId="ADAL" clId="{AA9102B5-DACA-D841-B260-AEEBF90FC60A}" dt="2020-01-05T22:05:52.483" v="41" actId="2696"/>
-        <pc:sldMkLst>
-          <pc:docMk/>
-          <pc:sldMk cId="1438711869" sldId="284"/>
-        </pc:sldMkLst>
-      </pc:sldChg>
-      <pc:sldChg chg="del">
-        <pc:chgData name="Long B Nguyen" userId="f59fb8f3-a021-417a-8bc1-65c8d471c621" providerId="ADAL" clId="{AA9102B5-DACA-D841-B260-AEEBF90FC60A}" dt="2020-01-05T22:05:52.199" v="24" actId="2696"/>
-        <pc:sldMkLst>
-          <pc:docMk/>
-          <pc:sldMk cId="131840209" sldId="286"/>
-        </pc:sldMkLst>
-      </pc:sldChg>
-      <pc:sldChg chg="del">
-        <pc:chgData name="Long B Nguyen" userId="f59fb8f3-a021-417a-8bc1-65c8d471c621" providerId="ADAL" clId="{AA9102B5-DACA-D841-B260-AEEBF90FC60A}" dt="2020-01-05T22:05:52.214" v="25" actId="2696"/>
-        <pc:sldMkLst>
-          <pc:docMk/>
-          <pc:sldMk cId="1816941262" sldId="295"/>
-        </pc:sldMkLst>
-      </pc:sldChg>
-      <pc:sldChg chg="del">
-        <pc:chgData name="Long B Nguyen" userId="f59fb8f3-a021-417a-8bc1-65c8d471c621" providerId="ADAL" clId="{AA9102B5-DACA-D841-B260-AEEBF90FC60A}" dt="2020-01-05T22:05:52.246" v="27" actId="2696"/>
-        <pc:sldMkLst>
-          <pc:docMk/>
-          <pc:sldMk cId="553003360" sldId="296"/>
-        </pc:sldMkLst>
-      </pc:sldChg>
-      <pc:sldChg chg="del">
-        <pc:chgData name="Long B Nguyen" userId="f59fb8f3-a021-417a-8bc1-65c8d471c621" providerId="ADAL" clId="{AA9102B5-DACA-D841-B260-AEEBF90FC60A}" dt="2020-01-05T22:05:52.268" v="28" actId="2696"/>
-        <pc:sldMkLst>
-          <pc:docMk/>
-          <pc:sldMk cId="3006175481" sldId="297"/>
-        </pc:sldMkLst>
-      </pc:sldChg>
-      <pc:sldChg chg="del">
-        <pc:chgData name="Long B Nguyen" userId="f59fb8f3-a021-417a-8bc1-65c8d471c621" providerId="ADAL" clId="{AA9102B5-DACA-D841-B260-AEEBF90FC60A}" dt="2020-01-05T22:05:52.287" v="29" actId="2696"/>
-        <pc:sldMkLst>
-          <pc:docMk/>
-          <pc:sldMk cId="3150557076" sldId="298"/>
-        </pc:sldMkLst>
-      </pc:sldChg>
-      <pc:sldChg chg="del">
-        <pc:chgData name="Long B Nguyen" userId="f59fb8f3-a021-417a-8bc1-65c8d471c621" providerId="ADAL" clId="{AA9102B5-DACA-D841-B260-AEEBF90FC60A}" dt="2020-01-05T22:05:52.442" v="38" actId="2696"/>
-        <pc:sldMkLst>
-          <pc:docMk/>
-          <pc:sldMk cId="128704095" sldId="302"/>
-        </pc:sldMkLst>
-      </pc:sldChg>
-      <pc:sldChg chg="del">
-        <pc:chgData name="Long B Nguyen" userId="f59fb8f3-a021-417a-8bc1-65c8d471c621" providerId="ADAL" clId="{AA9102B5-DACA-D841-B260-AEEBF90FC60A}" dt="2020-01-05T22:05:52.305" v="30" actId="2696"/>
-        <pc:sldMkLst>
-          <pc:docMk/>
-          <pc:sldMk cId="3275945509" sldId="303"/>
-        </pc:sldMkLst>
-      </pc:sldChg>
-      <pc:sldChg chg="del">
-        <pc:chgData name="Long B Nguyen" userId="f59fb8f3-a021-417a-8bc1-65c8d471c621" providerId="ADAL" clId="{AA9102B5-DACA-D841-B260-AEEBF90FC60A}" dt="2020-01-05T22:05:52.321" v="31" actId="2696"/>
-        <pc:sldMkLst>
-          <pc:docMk/>
-          <pc:sldMk cId="406772024" sldId="304"/>
-        </pc:sldMkLst>
-      </pc:sldChg>
-      <pc:sldChg chg="del">
-        <pc:chgData name="Long B Nguyen" userId="f59fb8f3-a021-417a-8bc1-65c8d471c621" providerId="ADAL" clId="{AA9102B5-DACA-D841-B260-AEEBF90FC60A}" dt="2020-01-05T22:05:52.334" v="32" actId="2696"/>
-        <pc:sldMkLst>
-          <pc:docMk/>
-          <pc:sldMk cId="1703902501" sldId="305"/>
-        </pc:sldMkLst>
-      </pc:sldChg>
-      <pc:sldChg chg="del">
-        <pc:chgData name="Long B Nguyen" userId="f59fb8f3-a021-417a-8bc1-65c8d471c621" providerId="ADAL" clId="{AA9102B5-DACA-D841-B260-AEEBF90FC60A}" dt="2020-01-05T22:05:52.461" v="39" actId="2696"/>
-        <pc:sldMkLst>
-          <pc:docMk/>
-          <pc:sldMk cId="3614829039" sldId="306"/>
-        </pc:sldMkLst>
-      </pc:sldChg>
-      <pc:sldChg chg="del">
-        <pc:chgData name="Long B Nguyen" userId="f59fb8f3-a021-417a-8bc1-65c8d471c621" providerId="ADAL" clId="{AA9102B5-DACA-D841-B260-AEEBF90FC60A}" dt="2020-01-05T22:05:52.471" v="40" actId="2696"/>
-        <pc:sldMkLst>
-          <pc:docMk/>
-          <pc:sldMk cId="295911327" sldId="307"/>
-        </pc:sldMkLst>
-      </pc:sldChg>
-      <pc:sldChg chg="del">
-        <pc:chgData name="Long B Nguyen" userId="f59fb8f3-a021-417a-8bc1-65c8d471c621" providerId="ADAL" clId="{AA9102B5-DACA-D841-B260-AEEBF90FC60A}" dt="2020-01-05T22:05:52.353" v="33" actId="2696"/>
-        <pc:sldMkLst>
-          <pc:docMk/>
-          <pc:sldMk cId="67957925" sldId="308"/>
-        </pc:sldMkLst>
-      </pc:sldChg>
-      <pc:sldChg chg="del">
-        <pc:chgData name="Long B Nguyen" userId="f59fb8f3-a021-417a-8bc1-65c8d471c621" providerId="ADAL" clId="{AA9102B5-DACA-D841-B260-AEEBF90FC60A}" dt="2020-01-05T22:05:52.365" v="34" actId="2696"/>
-        <pc:sldMkLst>
-          <pc:docMk/>
-          <pc:sldMk cId="1872435103" sldId="309"/>
-        </pc:sldMkLst>
-      </pc:sldChg>
-      <pc:sldChg chg="del">
-        <pc:chgData name="Long B Nguyen" userId="f59fb8f3-a021-417a-8bc1-65c8d471c621" providerId="ADAL" clId="{AA9102B5-DACA-D841-B260-AEEBF90FC60A}" dt="2020-01-05T22:05:52.385" v="35" actId="2696"/>
-        <pc:sldMkLst>
-          <pc:docMk/>
-          <pc:sldMk cId="4088965571" sldId="310"/>
-        </pc:sldMkLst>
-      </pc:sldChg>
-      <pc:sldChg chg="del">
-        <pc:chgData name="Long B Nguyen" userId="f59fb8f3-a021-417a-8bc1-65c8d471c621" providerId="ADAL" clId="{AA9102B5-DACA-D841-B260-AEEBF90FC60A}" dt="2020-01-05T22:05:52.404" v="36" actId="2696"/>
-        <pc:sldMkLst>
-          <pc:docMk/>
-          <pc:sldMk cId="2255846137" sldId="311"/>
-        </pc:sldMkLst>
-      </pc:sldChg>
-      <pc:sldChg chg="del">
-        <pc:chgData name="Long B Nguyen" userId="f59fb8f3-a021-417a-8bc1-65c8d471c621" providerId="ADAL" clId="{AA9102B5-DACA-D841-B260-AEEBF90FC60A}" dt="2020-01-05T22:05:52.423" v="37" actId="2696"/>
-        <pc:sldMkLst>
-          <pc:docMk/>
-          <pc:sldMk cId="1513627164" sldId="312"/>
-        </pc:sldMkLst>
-      </pc:sldChg>
-      <pc:sldChg chg="del">
-        <pc:chgData name="Long B Nguyen" userId="f59fb8f3-a021-417a-8bc1-65c8d471c621" providerId="ADAL" clId="{AA9102B5-DACA-D841-B260-AEEBF90FC60A}" dt="2020-01-05T22:05:52.231" v="26" actId="2696"/>
-        <pc:sldMkLst>
-          <pc:docMk/>
-          <pc:sldMk cId="2097059918" sldId="313"/>
-        </pc:sldMkLst>
-      </pc:sldChg>
-      <pc:sldChg chg="modSp">
-        <pc:chgData name="Long B Nguyen" userId="f59fb8f3-a021-417a-8bc1-65c8d471c621" providerId="ADAL" clId="{AA9102B5-DACA-D841-B260-AEEBF90FC60A}" dt="2020-01-06T15:37:30.346" v="948" actId="20577"/>
-        <pc:sldMkLst>
-          <pc:docMk/>
-          <pc:sldMk cId="1452600724" sldId="316"/>
-        </pc:sldMkLst>
-      </pc:sldChg>
-      <pc:sldChg chg="del">
-        <pc:chgData name="Long B Nguyen" userId="f59fb8f3-a021-417a-8bc1-65c8d471c621" providerId="ADAL" clId="{AA9102B5-DACA-D841-B260-AEEBF90FC60A}" dt="2020-01-06T15:03:11.354" v="848" actId="2696"/>
-        <pc:sldMkLst>
-          <pc:docMk/>
-          <pc:sldMk cId="1787114790" sldId="317"/>
-        </pc:sldMkLst>
-      </pc:sldChg>
-      <pc:sldChg chg="del">
-        <pc:chgData name="Long B Nguyen" userId="f59fb8f3-a021-417a-8bc1-65c8d471c621" providerId="ADAL" clId="{AA9102B5-DACA-D841-B260-AEEBF90FC60A}" dt="2020-01-05T22:06:12.101" v="42" actId="2696"/>
-        <pc:sldMkLst>
-          <pc:docMk/>
-          <pc:sldMk cId="1215229427" sldId="318"/>
-        </pc:sldMkLst>
-      </pc:sldChg>
-      <pc:sldChg chg="modSp">
-        <pc:chgData name="Long B Nguyen" userId="f59fb8f3-a021-417a-8bc1-65c8d471c621" providerId="ADAL" clId="{AA9102B5-DACA-D841-B260-AEEBF90FC60A}" dt="2020-01-06T01:48:03.413" v="110" actId="20577"/>
-        <pc:sldMkLst>
-          <pc:docMk/>
-          <pc:sldMk cId="924617162" sldId="319"/>
-        </pc:sldMkLst>
-      </pc:sldChg>
-      <pc:sldChg chg="modSp">
-        <pc:chgData name="Long B Nguyen" userId="f59fb8f3-a021-417a-8bc1-65c8d471c621" providerId="ADAL" clId="{AA9102B5-DACA-D841-B260-AEEBF90FC60A}" dt="2020-01-06T01:56:11.549" v="712" actId="1076"/>
-        <pc:sldMkLst>
-          <pc:docMk/>
-          <pc:sldMk cId="1310010799" sldId="324"/>
-        </pc:sldMkLst>
-      </pc:sldChg>
-      <pc:sldChg chg="modSp">
-        <pc:chgData name="Long B Nguyen" userId="f59fb8f3-a021-417a-8bc1-65c8d471c621" providerId="ADAL" clId="{AA9102B5-DACA-D841-B260-AEEBF90FC60A}" dt="2020-01-06T15:35:11.658" v="853" actId="20577"/>
-        <pc:sldMkLst>
-          <pc:docMk/>
-          <pc:sldMk cId="3314372952" sldId="325"/>
-        </pc:sldMkLst>
-      </pc:sldChg>
-      <pc:sldChg chg="del">
-        <pc:chgData name="Long B Nguyen" userId="f59fb8f3-a021-417a-8bc1-65c8d471c621" providerId="ADAL" clId="{AA9102B5-DACA-D841-B260-AEEBF90FC60A}" dt="2020-01-06T15:03:07.580" v="847" actId="2696"/>
-        <pc:sldMkLst>
-          <pc:docMk/>
-          <pc:sldMk cId="3117943122" sldId="326"/>
-        </pc:sldMkLst>
-      </pc:sldChg>
-      <pc:sldChg chg="del">
-        <pc:chgData name="Long B Nguyen" userId="f59fb8f3-a021-417a-8bc1-65c8d471c621" providerId="ADAL" clId="{AA9102B5-DACA-D841-B260-AEEBF90FC60A}" dt="2020-01-06T01:49:27.456" v="111" actId="2696"/>
-        <pc:sldMkLst>
-          <pc:docMk/>
-          <pc:sldMk cId="1025618360" sldId="327"/>
-        </pc:sldMkLst>
-      </pc:sldChg>
-      <pc:sldChg chg="modSp add">
-        <pc:chgData name="Long B Nguyen" userId="f59fb8f3-a021-417a-8bc1-65c8d471c621" providerId="ADAL" clId="{AA9102B5-DACA-D841-B260-AEEBF90FC60A}" dt="2020-01-06T15:00:48.763" v="818" actId="113"/>
-        <pc:sldMkLst>
-          <pc:docMk/>
-          <pc:sldMk cId="1724104636" sldId="327"/>
-        </pc:sldMkLst>
-      </pc:sldChg>
-      <pc:sldChg chg="modSp">
-        <pc:chgData name="Long B Nguyen" userId="f59fb8f3-a021-417a-8bc1-65c8d471c621" providerId="ADAL" clId="{AA9102B5-DACA-D841-B260-AEEBF90FC60A}" dt="2020-01-06T01:55:34.369" v="708" actId="20577"/>
-        <pc:sldMkLst>
-          <pc:docMk/>
-          <pc:sldMk cId="4294143140" sldId="329"/>
-        </pc:sldMkLst>
-      </pc:sldChg>
-      <pc:sldChg chg="modSp add">
-        <pc:chgData name="Long B Nguyen" userId="f59fb8f3-a021-417a-8bc1-65c8d471c621" providerId="ADAL" clId="{AA9102B5-DACA-D841-B260-AEEBF90FC60A}" dt="2020-01-06T15:01:01.638" v="819" actId="2711"/>
-        <pc:sldMkLst>
-          <pc:docMk/>
-          <pc:sldMk cId="3594730708" sldId="330"/>
-        </pc:sldMkLst>
-      </pc:sldChg>
-      <pc:sldChg chg="modSp add">
-        <pc:chgData name="Long B Nguyen" userId="f59fb8f3-a021-417a-8bc1-65c8d471c621" providerId="ADAL" clId="{AA9102B5-DACA-D841-B260-AEEBF90FC60A}" dt="2020-01-06T02:00:17.493" v="815" actId="255"/>
-        <pc:sldMkLst>
-          <pc:docMk/>
-          <pc:sldMk cId="3870816631" sldId="331"/>
-        </pc:sldMkLst>
-      </pc:sldChg>
-      <pc:sldChg chg="modSp add">
-        <pc:chgData name="Long B Nguyen" userId="f59fb8f3-a021-417a-8bc1-65c8d471c621" providerId="ADAL" clId="{AA9102B5-DACA-D841-B260-AEEBF90FC60A}" dt="2020-01-06T17:07:10.515" v="1519" actId="2711"/>
-        <pc:sldMkLst>
-          <pc:docMk/>
-          <pc:sldMk cId="3124353102" sldId="332"/>
-        </pc:sldMkLst>
-      </pc:sldChg>
-    </pc:docChg>
-  </pc:docChgLst>
-  <pc:docChgLst>
-    <pc:chgData name="Long B Nguyen" userId="f59fb8f3-a021-417a-8bc1-65c8d471c621" providerId="ADAL" clId="{B5860C40-AA08-4447-A918-2D2782E0FC0B}"/>
-    <pc:docChg chg="delSld modSld">
-      <pc:chgData name="Long B Nguyen" userId="f59fb8f3-a021-417a-8bc1-65c8d471c621" providerId="ADAL" clId="{B5860C40-AA08-4447-A918-2D2782E0FC0B}" dt="2019-09-16T13:59:20.091" v="35" actId="2696"/>
-      <pc:docMkLst>
-        <pc:docMk/>
-      </pc:docMkLst>
-      <pc:sldChg chg="modSp">
-        <pc:chgData name="Long B Nguyen" userId="f59fb8f3-a021-417a-8bc1-65c8d471c621" providerId="ADAL" clId="{B5860C40-AA08-4447-A918-2D2782E0FC0B}" dt="2019-09-16T13:58:36.640" v="18" actId="20577"/>
-        <pc:sldMkLst>
-          <pc:docMk/>
-          <pc:sldMk cId="4247104139" sldId="256"/>
-        </pc:sldMkLst>
+        <pc:picChg chg="add mod">
+          <ac:chgData name="Long B Nguyen" userId="f59fb8f3-a021-417a-8bc1-65c8d471c621" providerId="ADAL" clId="{93BE87BA-F8CA-5C1F-82FF-B4CAB5F485A1}" dt="2026-02-25T18:54:04.745" v="33" actId="1076"/>
+          <ac:picMkLst>
+            <pc:docMk/>
+            <pc:sldMk cId="2963124289" sldId="593"/>
+            <ac:picMk id="2" creationId="{ED58A264-102B-7A50-F3AE-8D4F466A0C24}"/>
+          </ac:picMkLst>
+        </pc:picChg>
+        <pc:picChg chg="mod">
+          <ac:chgData name="Long B Nguyen" userId="f59fb8f3-a021-417a-8bc1-65c8d471c621" providerId="ADAL" clId="{93BE87BA-F8CA-5C1F-82FF-B4CAB5F485A1}" dt="2026-02-25T18:54:57.354" v="38" actId="1076"/>
+          <ac:picMkLst>
+            <pc:docMk/>
+            <pc:sldMk cId="2963124289" sldId="593"/>
+            <ac:picMk id="38916" creationId="{8720B090-DCDD-0E44-B6F5-49D2ED5D8A00}"/>
+          </ac:picMkLst>
+        </pc:picChg>
+        <pc:picChg chg="del mod">
+          <ac:chgData name="Long B Nguyen" userId="f59fb8f3-a021-417a-8bc1-65c8d471c621" providerId="ADAL" clId="{93BE87BA-F8CA-5C1F-82FF-B4CAB5F485A1}" dt="2026-02-25T18:17:34.273" v="9" actId="21"/>
+          <ac:picMkLst>
+            <pc:docMk/>
+            <pc:sldMk cId="2963124289" sldId="593"/>
+            <ac:picMk id="38917" creationId="{1B40FF63-EA73-7A44-8137-79F00DEAEDD8}"/>
+          </ac:picMkLst>
+        </pc:picChg>
       </pc:sldChg>
     </pc:docChg>
   </pc:docChgLst>
@@ -2364,7 +279,7 @@
           <a:p>
             <a:fld id="{11759725-BFEE-644C-A872-B7D4268C5620}" type="datetimeFigureOut">
               <a:rPr lang="en-US" smtClean="0"/>
-              <a:t>11/23/24</a:t>
+              <a:t>2/25/26</a:t>
             </a:fld>
             <a:endParaRPr lang="en-US"/>
           </a:p>
@@ -10544,7 +8459,7 @@
           <a:p>
             <a:fld id="{4AAD347D-5ACD-4C99-B74B-A9C85AD731AF}" type="datetimeFigureOut">
               <a:rPr lang="en-US" smtClean="0"/>
-              <a:t>11/23/24</a:t>
+              <a:t>2/25/26</a:t>
             </a:fld>
             <a:endParaRPr lang="en-US" dirty="0"/>
           </a:p>
@@ -10714,7 +8629,7 @@
           <a:p>
             <a:fld id="{4509A250-FF31-4206-8172-F9D3106AACB1}" type="datetimeFigureOut">
               <a:rPr lang="en-US" smtClean="0"/>
-              <a:t>11/23/24</a:t>
+              <a:t>2/25/26</a:t>
             </a:fld>
             <a:endParaRPr lang="en-US" dirty="0"/>
           </a:p>
@@ -10894,7 +8809,7 @@
           <a:p>
             <a:fld id="{4509A250-FF31-4206-8172-F9D3106AACB1}" type="datetimeFigureOut">
               <a:rPr lang="en-US" smtClean="0"/>
-              <a:t>11/23/24</a:t>
+              <a:t>2/25/26</a:t>
             </a:fld>
             <a:endParaRPr lang="en-US" dirty="0"/>
           </a:p>
@@ -11064,7 +8979,7 @@
           <a:p>
             <a:fld id="{4509A250-FF31-4206-8172-F9D3106AACB1}" type="datetimeFigureOut">
               <a:rPr lang="en-US" smtClean="0"/>
-              <a:t>11/23/24</a:t>
+              <a:t>2/25/26</a:t>
             </a:fld>
             <a:endParaRPr lang="en-US" dirty="0"/>
           </a:p>
@@ -11310,7 +9225,7 @@
           <a:p>
             <a:fld id="{9796027F-7875-4030-9381-8BD8C4F21935}" type="datetimeFigureOut">
               <a:rPr lang="en-US" smtClean="0"/>
-              <a:t>11/23/24</a:t>
+              <a:t>2/25/26</a:t>
             </a:fld>
             <a:endParaRPr lang="en-US" dirty="0"/>
           </a:p>
@@ -11542,7 +9457,7 @@
           <a:p>
             <a:fld id="{9796027F-7875-4030-9381-8BD8C4F21935}" type="datetimeFigureOut">
               <a:rPr lang="en-US" smtClean="0"/>
-              <a:t>11/23/24</a:t>
+              <a:t>2/25/26</a:t>
             </a:fld>
             <a:endParaRPr lang="en-US" dirty="0"/>
           </a:p>
@@ -11909,7 +9824,7 @@
           <a:p>
             <a:fld id="{9796027F-7875-4030-9381-8BD8C4F21935}" type="datetimeFigureOut">
               <a:rPr lang="en-US" smtClean="0"/>
-              <a:t>11/23/24</a:t>
+              <a:t>2/25/26</a:t>
             </a:fld>
             <a:endParaRPr lang="en-US" dirty="0"/>
           </a:p>
@@ -12027,7 +9942,7 @@
           <a:p>
             <a:fld id="{4509A250-FF31-4206-8172-F9D3106AACB1}" type="datetimeFigureOut">
               <a:rPr lang="en-US" smtClean="0"/>
-              <a:t>11/23/24</a:t>
+              <a:t>2/25/26</a:t>
             </a:fld>
             <a:endParaRPr lang="en-US" dirty="0"/>
           </a:p>
@@ -12122,7 +10037,7 @@
           <a:p>
             <a:fld id="{4509A250-FF31-4206-8172-F9D3106AACB1}" type="datetimeFigureOut">
               <a:rPr lang="en-US" smtClean="0"/>
-              <a:t>11/23/24</a:t>
+              <a:t>2/25/26</a:t>
             </a:fld>
             <a:endParaRPr lang="en-US" dirty="0"/>
           </a:p>
@@ -12399,7 +10314,7 @@
           <a:p>
             <a:fld id="{4509A250-FF31-4206-8172-F9D3106AACB1}" type="datetimeFigureOut">
               <a:rPr lang="en-US" smtClean="0"/>
-              <a:t>11/23/24</a:t>
+              <a:t>2/25/26</a:t>
             </a:fld>
             <a:endParaRPr lang="en-US" dirty="0"/>
           </a:p>
@@ -12656,7 +10571,7 @@
           <a:p>
             <a:fld id="{4509A250-FF31-4206-8172-F9D3106AACB1}" type="datetimeFigureOut">
               <a:rPr lang="en-US" smtClean="0"/>
-              <a:t>11/23/24</a:t>
+              <a:t>2/25/26</a:t>
             </a:fld>
             <a:endParaRPr lang="en-US" dirty="0"/>
           </a:p>
@@ -12869,7 +10784,7 @@
           <a:p>
             <a:fld id="{4AAD347D-5ACD-4C99-B74B-A9C85AD731AF}" type="datetimeFigureOut">
               <a:rPr lang="en-US" smtClean="0"/>
-              <a:t>11/23/24</a:t>
+              <a:t>2/25/26</a:t>
             </a:fld>
             <a:endParaRPr lang="en-US" dirty="0"/>
           </a:p>
@@ -15300,8 +13215,8 @@
         </p:blipFill>
         <p:spPr bwMode="auto">
           <a:xfrm>
-            <a:off x="4349218" y="2416740"/>
-            <a:ext cx="3479734" cy="950083"/>
+            <a:off x="4978400" y="2602117"/>
+            <a:ext cx="1870710" cy="510766"/>
           </a:xfrm>
           <a:prstGeom prst="rect">
             <a:avLst/>
@@ -15333,10 +13248,10 @@
       </p:pic>
       <p:pic>
         <p:nvPicPr>
-          <p:cNvPr id="38917" name="Picture 1">
+          <p:cNvPr id="2" name="Picture 1">
             <a:extLst>
               <a:ext uri="{FF2B5EF4-FFF2-40B4-BE49-F238E27FC236}">
-                <a16:creationId xmlns:a16="http://schemas.microsoft.com/office/drawing/2014/main" id="{1B40FF63-EA73-7A44-8137-79F00DEAEDD8}"/>
+                <a16:creationId xmlns:a16="http://schemas.microsoft.com/office/drawing/2014/main" id="{ED58A264-102B-7A50-F3AE-8D4F466A0C24}"/>
               </a:ext>
             </a:extLst>
           </p:cNvPr>
@@ -15360,8 +13275,8 @@
         </p:blipFill>
         <p:spPr bwMode="auto">
           <a:xfrm>
-            <a:off x="2622992" y="3639629"/>
-            <a:ext cx="4971690" cy="1678496"/>
+            <a:off x="1640229" y="3636579"/>
+            <a:ext cx="2958796" cy="998921"/>
           </a:xfrm>
           <a:prstGeom prst="rect">
             <a:avLst/>
@@ -15453,60 +13368,15 @@
                                   </p:childTnLst>
                                 </p:cTn>
                               </p:par>
-                            </p:childTnLst>
-                          </p:cTn>
-                        </p:par>
-                      </p:childTnLst>
-                    </p:cTn>
-                  </p:par>
-                  <p:par>
-                    <p:cTn id="7" fill="hold">
-                      <p:stCondLst>
-                        <p:cond delay="indefinite"/>
-                      </p:stCondLst>
-                      <p:childTnLst>
-                        <p:par>
-                          <p:cTn id="8" fill="hold">
-                            <p:stCondLst>
-                              <p:cond delay="0"/>
-                            </p:stCondLst>
-                            <p:childTnLst>
                               <p:par>
-                                <p:cTn id="9" presetID="1" presetClass="entr" presetSubtype="0" fill="hold" nodeType="clickEffect">
+                                <p:cTn id="7" presetID="1" presetClass="entr" presetSubtype="0" fill="hold" nodeType="withEffect">
                                   <p:stCondLst>
                                     <p:cond delay="0"/>
                                   </p:stCondLst>
                                   <p:childTnLst>
                                     <p:set>
                                       <p:cBhvr>
-                                        <p:cTn id="10" dur="1" fill="hold">
-                                          <p:stCondLst>
-                                            <p:cond delay="0"/>
-                                          </p:stCondLst>
-                                        </p:cTn>
-                                        <p:tgtEl>
-                                          <p:spTgt spid="38917"/>
-                                        </p:tgtEl>
-                                        <p:attrNameLst>
-                                          <p:attrName>style.visibility</p:attrName>
-                                        </p:attrNameLst>
-                                      </p:cBhvr>
-                                      <p:to>
-                                        <p:strVal val="visible"/>
-                                      </p:to>
-                                    </p:set>
-                                  </p:childTnLst>
-                                </p:cTn>
-                              </p:par>
-                              <p:par>
-                                <p:cTn id="11" presetID="1" presetClass="entr" presetSubtype="0" fill="hold" nodeType="withEffect">
-                                  <p:stCondLst>
-                                    <p:cond delay="0"/>
-                                  </p:stCondLst>
-                                  <p:childTnLst>
-                                    <p:set>
-                                      <p:cBhvr>
-                                        <p:cTn id="12" dur="1" fill="hold">
+                                        <p:cTn id="8" dur="1" fill="hold">
                                           <p:stCondLst>
                                             <p:cond delay="0"/>
                                           </p:stCondLst>
@@ -15532,19 +13402,81 @@
                     </p:cTn>
                   </p:par>
                   <p:par>
-                    <p:cTn id="13" fill="hold">
+                    <p:cTn id="9" fill="hold">
                       <p:stCondLst>
                         <p:cond delay="indefinite"/>
                       </p:stCondLst>
                       <p:childTnLst>
                         <p:par>
-                          <p:cTn id="14" fill="hold">
+                          <p:cTn id="10" fill="hold">
                             <p:stCondLst>
                               <p:cond delay="0"/>
                             </p:stCondLst>
                             <p:childTnLst>
                               <p:par>
-                                <p:cTn id="15" presetID="1" presetClass="entr" presetSubtype="0" fill="hold" nodeType="clickEffect">
+                                <p:cTn id="11" presetID="1" presetClass="entr" presetSubtype="0" fill="hold" nodeType="clickEffect">
+                                  <p:stCondLst>
+                                    <p:cond delay="0"/>
+                                  </p:stCondLst>
+                                  <p:childTnLst>
+                                    <p:set>
+                                      <p:cBhvr>
+                                        <p:cTn id="12" dur="1" fill="hold">
+                                          <p:stCondLst>
+                                            <p:cond delay="0"/>
+                                          </p:stCondLst>
+                                        </p:cTn>
+                                        <p:tgtEl>
+                                          <p:spTgt spid="16386">
+                                            <p:txEl>
+                                              <p:pRg st="4" end="4"/>
+                                            </p:txEl>
+                                          </p:spTgt>
+                                        </p:tgtEl>
+                                        <p:attrNameLst>
+                                          <p:attrName>style.visibility</p:attrName>
+                                        </p:attrNameLst>
+                                      </p:cBhvr>
+                                      <p:to>
+                                        <p:strVal val="visible"/>
+                                      </p:to>
+                                    </p:set>
+                                  </p:childTnLst>
+                                </p:cTn>
+                              </p:par>
+                              <p:par>
+                                <p:cTn id="13" presetID="1" presetClass="entr" presetSubtype="0" fill="hold" nodeType="withEffect">
+                                  <p:stCondLst>
+                                    <p:cond delay="0"/>
+                                  </p:stCondLst>
+                                  <p:childTnLst>
+                                    <p:set>
+                                      <p:cBhvr>
+                                        <p:cTn id="14" dur="1" fill="hold">
+                                          <p:stCondLst>
+                                            <p:cond delay="0"/>
+                                          </p:stCondLst>
+                                        </p:cTn>
+                                        <p:tgtEl>
+                                          <p:spTgt spid="16386">
+                                            <p:txEl>
+                                              <p:pRg st="5" end="5"/>
+                                            </p:txEl>
+                                          </p:spTgt>
+                                        </p:tgtEl>
+                                        <p:attrNameLst>
+                                          <p:attrName>style.visibility</p:attrName>
+                                        </p:attrNameLst>
+                                      </p:cBhvr>
+                                      <p:to>
+                                        <p:strVal val="visible"/>
+                                      </p:to>
+                                    </p:set>
+                                  </p:childTnLst>
+                                </p:cTn>
+                              </p:par>
+                              <p:par>
+                                <p:cTn id="15" presetID="1" presetClass="entr" presetSubtype="0" fill="hold" nodeType="withEffect">
                                   <p:stCondLst>
                                     <p:cond delay="0"/>
                                   </p:stCondLst>
@@ -15559,7 +13491,7 @@
                                         <p:tgtEl>
                                           <p:spTgt spid="16386">
                                             <p:txEl>
-                                              <p:pRg st="4" end="4"/>
+                                              <p:pRg st="6" end="6"/>
                                             </p:txEl>
                                           </p:spTgt>
                                         </p:tgtEl>
@@ -15590,7 +13522,7 @@
                                         <p:tgtEl>
                                           <p:spTgt spid="16386">
                                             <p:txEl>
-                                              <p:pRg st="5" end="5"/>
+                                              <p:pRg st="7" end="7"/>
                                             </p:txEl>
                                           </p:spTgt>
                                         </p:tgtEl>
@@ -15605,39 +13537,26 @@
                                   </p:childTnLst>
                                 </p:cTn>
                               </p:par>
+                            </p:childTnLst>
+                          </p:cTn>
+                        </p:par>
+                      </p:childTnLst>
+                    </p:cTn>
+                  </p:par>
+                  <p:par>
+                    <p:cTn id="19" fill="hold">
+                      <p:stCondLst>
+                        <p:cond delay="indefinite"/>
+                      </p:stCondLst>
+                      <p:childTnLst>
+                        <p:par>
+                          <p:cTn id="20" fill="hold">
+                            <p:stCondLst>
+                              <p:cond delay="0"/>
+                            </p:stCondLst>
+                            <p:childTnLst>
                               <p:par>
-                                <p:cTn id="19" presetID="1" presetClass="entr" presetSubtype="0" fill="hold" nodeType="withEffect">
-                                  <p:stCondLst>
-                                    <p:cond delay="0"/>
-                                  </p:stCondLst>
-                                  <p:childTnLst>
-                                    <p:set>
-                                      <p:cBhvr>
-                                        <p:cTn id="20" dur="1" fill="hold">
-                                          <p:stCondLst>
-                                            <p:cond delay="0"/>
-                                          </p:stCondLst>
-                                        </p:cTn>
-                                        <p:tgtEl>
-                                          <p:spTgt spid="16386">
-                                            <p:txEl>
-                                              <p:pRg st="6" end="6"/>
-                                            </p:txEl>
-                                          </p:spTgt>
-                                        </p:tgtEl>
-                                        <p:attrNameLst>
-                                          <p:attrName>style.visibility</p:attrName>
-                                        </p:attrNameLst>
-                                      </p:cBhvr>
-                                      <p:to>
-                                        <p:strVal val="visible"/>
-                                      </p:to>
-                                    </p:set>
-                                  </p:childTnLst>
-                                </p:cTn>
-                              </p:par>
-                              <p:par>
-                                <p:cTn id="21" presetID="1" presetClass="entr" presetSubtype="0" fill="hold" nodeType="withEffect">
+                                <p:cTn id="21" presetID="1" presetClass="entr" presetSubtype="0" fill="hold" nodeType="clickEffect">
                                   <p:stCondLst>
                                     <p:cond delay="0"/>
                                   </p:stCondLst>
@@ -15650,11 +13569,7 @@
                                           </p:stCondLst>
                                         </p:cTn>
                                         <p:tgtEl>
-                                          <p:spTgt spid="16386">
-                                            <p:txEl>
-                                              <p:pRg st="7" end="7"/>
-                                            </p:txEl>
-                                          </p:spTgt>
+                                          <p:spTgt spid="2"/>
                                         </p:tgtEl>
                                         <p:attrNameLst>
                                           <p:attrName>style.visibility</p:attrName>
